--- a/slides/Module5_Capstone.pptx
+++ b/slides/Module5_Capstone.pptx
@@ -5,22 +5,22 @@
     <p:sldMasterId id="2147483648" r:id="rId1"/>
   </p:sldMasterIdLst>
   <p:sldIdLst>
-    <p:sldId id="256" r:id="rId7"/>
-    <p:sldId id="257" r:id="rId8"/>
-    <p:sldId id="258" r:id="rId9"/>
-    <p:sldId id="259" r:id="rId10"/>
-    <p:sldId id="260" r:id="rId11"/>
-    <p:sldId id="261" r:id="rId12"/>
-    <p:sldId id="262" r:id="rId13"/>
-    <p:sldId id="263" r:id="rId14"/>
-    <p:sldId id="264" r:id="rId15"/>
-    <p:sldId id="265" r:id="rId16"/>
-    <p:sldId id="266" r:id="rId17"/>
-    <p:sldId id="267" r:id="rId18"/>
-    <p:sldId id="268" r:id="rId19"/>
-    <p:sldId id="269" r:id="rId20"/>
+    <p:sldId id="256" r:id="rId2"/>
+    <p:sldId id="257" r:id="rId3"/>
+    <p:sldId id="258" r:id="rId4"/>
+    <p:sldId id="259" r:id="rId5"/>
+    <p:sldId id="260" r:id="rId6"/>
+    <p:sldId id="261" r:id="rId7"/>
+    <p:sldId id="262" r:id="rId8"/>
+    <p:sldId id="263" r:id="rId9"/>
+    <p:sldId id="264" r:id="rId10"/>
+    <p:sldId id="265" r:id="rId11"/>
+    <p:sldId id="266" r:id="rId12"/>
+    <p:sldId id="267" r:id="rId13"/>
+    <p:sldId id="268" r:id="rId14"/>
+    <p:sldId id="269" r:id="rId15"/>
   </p:sldIdLst>
-  <p:sldSz cx="12191695" cy="6858000" type="screen4x3"/>
+  <p:sldSz cx="12192000" cy="6858000"/>
   <p:notesSz cx="6858000" cy="9144000"/>
   <p:defaultTextStyle>
     <a:defPPr>
@@ -117,6 +117,22 @@
       </a:defRPr>
     </a:lvl9pPr>
   </p:defaultTextStyle>
+  <p:extLst>
+    <p:ext uri="{EFAFB233-063F-42B5-8137-9DF3F51BA10A}">
+      <p15:sldGuideLst xmlns:p15="http://schemas.microsoft.com/office/powerpoint/2012/main">
+        <p15:guide id="1" orient="horz" pos="2160">
+          <p15:clr>
+            <a:srgbClr val="A4A3A4"/>
+          </p15:clr>
+        </p15:guide>
+        <p15:guide id="2" pos="2880">
+          <p15:clr>
+            <a:srgbClr val="A4A3A4"/>
+          </p15:clr>
+        </p15:guide>
+      </p15:sldGuideLst>
+    </p:ext>
+  </p:extLst>
 </p:presentation>
 </file>
 
@@ -158,10 +174,9 @@
           <a:lstStyle/>
           <a:p>
             <a:r>
-              <a:rPr lang="en-US" smtClean="0"/>
+              <a:rPr lang="en-US"/>
               <a:t>Click to edit Master title style</a:t>
             </a:r>
-            <a:endParaRPr lang="en-US"/>
           </a:p>
         </p:txBody>
       </p:sp>
@@ -277,10 +292,9 @@
           </a:lstStyle>
           <a:p>
             <a:r>
-              <a:rPr lang="en-US" smtClean="0"/>
+              <a:rPr lang="en-US"/>
               <a:t>Click to edit Master subtitle style</a:t>
             </a:r>
-            <a:endParaRPr lang="en-US"/>
           </a:p>
         </p:txBody>
       </p:sp>
@@ -301,7 +315,7 @@
           <a:p>
             <a:fld id="{5BCAD085-E8A6-8845-BD4E-CB4CCA059FC4}" type="datetimeFigureOut">
               <a:rPr lang="en-US" smtClean="0"/>
-              <a:t>1/27/13</a:t>
+              <a:t>8/20/26</a:t>
             </a:fld>
             <a:endParaRPr lang="en-US"/>
           </a:p>
@@ -395,10 +409,9 @@
           <a:lstStyle/>
           <a:p>
             <a:r>
-              <a:rPr lang="en-US" smtClean="0"/>
+              <a:rPr lang="en-US"/>
               <a:t>Click to edit Master title style</a:t>
             </a:r>
-            <a:endParaRPr lang="en-US"/>
           </a:p>
         </p:txBody>
       </p:sp>
@@ -419,38 +432,37 @@
           <a:p>
             <a:pPr lvl="0"/>
             <a:r>
-              <a:rPr lang="en-US" smtClean="0"/>
+              <a:rPr lang="en-US"/>
               <a:t>Click to edit Master text styles</a:t>
             </a:r>
           </a:p>
           <a:p>
             <a:pPr lvl="1"/>
             <a:r>
-              <a:rPr lang="en-US" smtClean="0"/>
+              <a:rPr lang="en-US"/>
               <a:t>Second level</a:t>
             </a:r>
           </a:p>
           <a:p>
             <a:pPr lvl="2"/>
             <a:r>
-              <a:rPr lang="en-US" smtClean="0"/>
+              <a:rPr lang="en-US"/>
               <a:t>Third level</a:t>
             </a:r>
           </a:p>
           <a:p>
             <a:pPr lvl="3"/>
             <a:r>
-              <a:rPr lang="en-US" smtClean="0"/>
+              <a:rPr lang="en-US"/>
               <a:t>Fourth level</a:t>
             </a:r>
           </a:p>
           <a:p>
             <a:pPr lvl="4"/>
             <a:r>
-              <a:rPr lang="en-US" smtClean="0"/>
+              <a:rPr lang="en-US"/>
               <a:t>Fifth level</a:t>
             </a:r>
-            <a:endParaRPr lang="en-US"/>
           </a:p>
         </p:txBody>
       </p:sp>
@@ -471,7 +483,7 @@
           <a:p>
             <a:fld id="{5BCAD085-E8A6-8845-BD4E-CB4CCA059FC4}" type="datetimeFigureOut">
               <a:rPr lang="en-US" smtClean="0"/>
-              <a:t>1/27/13</a:t>
+              <a:t>8/20/26</a:t>
             </a:fld>
             <a:endParaRPr lang="en-US"/>
           </a:p>
@@ -570,10 +582,9 @@
           <a:lstStyle/>
           <a:p>
             <a:r>
-              <a:rPr lang="en-US" smtClean="0"/>
+              <a:rPr lang="en-US"/>
               <a:t>Click to edit Master title style</a:t>
             </a:r>
-            <a:endParaRPr lang="en-US"/>
           </a:p>
         </p:txBody>
       </p:sp>
@@ -599,38 +610,37 @@
           <a:p>
             <a:pPr lvl="0"/>
             <a:r>
-              <a:rPr lang="en-US" smtClean="0"/>
+              <a:rPr lang="en-US"/>
               <a:t>Click to edit Master text styles</a:t>
             </a:r>
           </a:p>
           <a:p>
             <a:pPr lvl="1"/>
             <a:r>
-              <a:rPr lang="en-US" smtClean="0"/>
+              <a:rPr lang="en-US"/>
               <a:t>Second level</a:t>
             </a:r>
           </a:p>
           <a:p>
             <a:pPr lvl="2"/>
             <a:r>
-              <a:rPr lang="en-US" smtClean="0"/>
+              <a:rPr lang="en-US"/>
               <a:t>Third level</a:t>
             </a:r>
           </a:p>
           <a:p>
             <a:pPr lvl="3"/>
             <a:r>
-              <a:rPr lang="en-US" smtClean="0"/>
+              <a:rPr lang="en-US"/>
               <a:t>Fourth level</a:t>
             </a:r>
           </a:p>
           <a:p>
             <a:pPr lvl="4"/>
             <a:r>
-              <a:rPr lang="en-US" smtClean="0"/>
+              <a:rPr lang="en-US"/>
               <a:t>Fifth level</a:t>
             </a:r>
-            <a:endParaRPr lang="en-US"/>
           </a:p>
         </p:txBody>
       </p:sp>
@@ -651,7 +661,7 @@
           <a:p>
             <a:fld id="{5BCAD085-E8A6-8845-BD4E-CB4CCA059FC4}" type="datetimeFigureOut">
               <a:rPr lang="en-US" smtClean="0"/>
-              <a:t>1/27/13</a:t>
+              <a:t>8/20/26</a:t>
             </a:fld>
             <a:endParaRPr lang="en-US"/>
           </a:p>
@@ -745,10 +755,9 @@
           <a:lstStyle/>
           <a:p>
             <a:r>
-              <a:rPr lang="en-US" smtClean="0"/>
+              <a:rPr lang="en-US"/>
               <a:t>Click to edit Master title style</a:t>
             </a:r>
-            <a:endParaRPr lang="en-US"/>
           </a:p>
         </p:txBody>
       </p:sp>
@@ -769,38 +778,37 @@
           <a:p>
             <a:pPr lvl="0"/>
             <a:r>
-              <a:rPr lang="en-US" smtClean="0"/>
+              <a:rPr lang="en-US"/>
               <a:t>Click to edit Master text styles</a:t>
             </a:r>
           </a:p>
           <a:p>
             <a:pPr lvl="1"/>
             <a:r>
-              <a:rPr lang="en-US" smtClean="0"/>
+              <a:rPr lang="en-US"/>
               <a:t>Second level</a:t>
             </a:r>
           </a:p>
           <a:p>
             <a:pPr lvl="2"/>
             <a:r>
-              <a:rPr lang="en-US" smtClean="0"/>
+              <a:rPr lang="en-US"/>
               <a:t>Third level</a:t>
             </a:r>
           </a:p>
           <a:p>
             <a:pPr lvl="3"/>
             <a:r>
-              <a:rPr lang="en-US" smtClean="0"/>
+              <a:rPr lang="en-US"/>
               <a:t>Fourth level</a:t>
             </a:r>
           </a:p>
           <a:p>
             <a:pPr lvl="4"/>
             <a:r>
-              <a:rPr lang="en-US" smtClean="0"/>
+              <a:rPr lang="en-US"/>
               <a:t>Fifth level</a:t>
             </a:r>
-            <a:endParaRPr lang="en-US"/>
           </a:p>
         </p:txBody>
       </p:sp>
@@ -821,7 +829,7 @@
           <a:p>
             <a:fld id="{5BCAD085-E8A6-8845-BD4E-CB4CCA059FC4}" type="datetimeFigureOut">
               <a:rPr lang="en-US" smtClean="0"/>
-              <a:t>1/27/13</a:t>
+              <a:t>8/20/26</a:t>
             </a:fld>
             <a:endParaRPr lang="en-US"/>
           </a:p>
@@ -924,10 +932,9 @@
           </a:lstStyle>
           <a:p>
             <a:r>
-              <a:rPr lang="en-US" smtClean="0"/>
+              <a:rPr lang="en-US"/>
               <a:t>Click to edit Master title style</a:t>
             </a:r>
-            <a:endParaRPr lang="en-US"/>
           </a:p>
         </p:txBody>
       </p:sp>
@@ -1044,7 +1051,7 @@
           <a:p>
             <a:pPr lvl="0"/>
             <a:r>
-              <a:rPr lang="en-US" smtClean="0"/>
+              <a:rPr lang="en-US"/>
               <a:t>Click to edit Master text styles</a:t>
             </a:r>
           </a:p>
@@ -1067,7 +1074,7 @@
           <a:p>
             <a:fld id="{5BCAD085-E8A6-8845-BD4E-CB4CCA059FC4}" type="datetimeFigureOut">
               <a:rPr lang="en-US" smtClean="0"/>
-              <a:t>1/27/13</a:t>
+              <a:t>8/20/26</a:t>
             </a:fld>
             <a:endParaRPr lang="en-US"/>
           </a:p>
@@ -1161,10 +1168,9 @@
           <a:lstStyle/>
           <a:p>
             <a:r>
-              <a:rPr lang="en-US" smtClean="0"/>
+              <a:rPr lang="en-US"/>
               <a:t>Click to edit Master title style</a:t>
             </a:r>
-            <a:endParaRPr lang="en-US"/>
           </a:p>
         </p:txBody>
       </p:sp>
@@ -1218,38 +1224,37 @@
           <a:p>
             <a:pPr lvl="0"/>
             <a:r>
-              <a:rPr lang="en-US" smtClean="0"/>
+              <a:rPr lang="en-US"/>
               <a:t>Click to edit Master text styles</a:t>
             </a:r>
           </a:p>
           <a:p>
             <a:pPr lvl="1"/>
             <a:r>
-              <a:rPr lang="en-US" smtClean="0"/>
+              <a:rPr lang="en-US"/>
               <a:t>Second level</a:t>
             </a:r>
           </a:p>
           <a:p>
             <a:pPr lvl="2"/>
             <a:r>
-              <a:rPr lang="en-US" smtClean="0"/>
+              <a:rPr lang="en-US"/>
               <a:t>Third level</a:t>
             </a:r>
           </a:p>
           <a:p>
             <a:pPr lvl="3"/>
             <a:r>
-              <a:rPr lang="en-US" smtClean="0"/>
+              <a:rPr lang="en-US"/>
               <a:t>Fourth level</a:t>
             </a:r>
           </a:p>
           <a:p>
             <a:pPr lvl="4"/>
             <a:r>
-              <a:rPr lang="en-US" smtClean="0"/>
+              <a:rPr lang="en-US"/>
               <a:t>Fifth level</a:t>
             </a:r>
-            <a:endParaRPr lang="en-US"/>
           </a:p>
         </p:txBody>
       </p:sp>
@@ -1303,38 +1308,37 @@
           <a:p>
             <a:pPr lvl="0"/>
             <a:r>
-              <a:rPr lang="en-US" smtClean="0"/>
+              <a:rPr lang="en-US"/>
               <a:t>Click to edit Master text styles</a:t>
             </a:r>
           </a:p>
           <a:p>
             <a:pPr lvl="1"/>
             <a:r>
-              <a:rPr lang="en-US" smtClean="0"/>
+              <a:rPr lang="en-US"/>
               <a:t>Second level</a:t>
             </a:r>
           </a:p>
           <a:p>
             <a:pPr lvl="2"/>
             <a:r>
-              <a:rPr lang="en-US" smtClean="0"/>
+              <a:rPr lang="en-US"/>
               <a:t>Third level</a:t>
             </a:r>
           </a:p>
           <a:p>
             <a:pPr lvl="3"/>
             <a:r>
-              <a:rPr lang="en-US" smtClean="0"/>
+              <a:rPr lang="en-US"/>
               <a:t>Fourth level</a:t>
             </a:r>
           </a:p>
           <a:p>
             <a:pPr lvl="4"/>
             <a:r>
-              <a:rPr lang="en-US" smtClean="0"/>
+              <a:rPr lang="en-US"/>
               <a:t>Fifth level</a:t>
             </a:r>
-            <a:endParaRPr lang="en-US"/>
           </a:p>
         </p:txBody>
       </p:sp>
@@ -1355,7 +1359,7 @@
           <a:p>
             <a:fld id="{5BCAD085-E8A6-8845-BD4E-CB4CCA059FC4}" type="datetimeFigureOut">
               <a:rPr lang="en-US" smtClean="0"/>
-              <a:t>1/27/13</a:t>
+              <a:t>8/20/26</a:t>
             </a:fld>
             <a:endParaRPr lang="en-US"/>
           </a:p>
@@ -1453,10 +1457,9 @@
           </a:lstStyle>
           <a:p>
             <a:r>
-              <a:rPr lang="en-US" smtClean="0"/>
+              <a:rPr lang="en-US"/>
               <a:t>Click to edit Master title style</a:t>
             </a:r>
-            <a:endParaRPr lang="en-US"/>
           </a:p>
         </p:txBody>
       </p:sp>
@@ -1519,7 +1522,7 @@
           <a:p>
             <a:pPr lvl="0"/>
             <a:r>
-              <a:rPr lang="en-US" smtClean="0"/>
+              <a:rPr lang="en-US"/>
               <a:t>Click to edit Master text styles</a:t>
             </a:r>
           </a:p>
@@ -1575,38 +1578,37 @@
           <a:p>
             <a:pPr lvl="0"/>
             <a:r>
-              <a:rPr lang="en-US" smtClean="0"/>
+              <a:rPr lang="en-US"/>
               <a:t>Click to edit Master text styles</a:t>
             </a:r>
           </a:p>
           <a:p>
             <a:pPr lvl="1"/>
             <a:r>
-              <a:rPr lang="en-US" smtClean="0"/>
+              <a:rPr lang="en-US"/>
               <a:t>Second level</a:t>
             </a:r>
           </a:p>
           <a:p>
             <a:pPr lvl="2"/>
             <a:r>
-              <a:rPr lang="en-US" smtClean="0"/>
+              <a:rPr lang="en-US"/>
               <a:t>Third level</a:t>
             </a:r>
           </a:p>
           <a:p>
             <a:pPr lvl="3"/>
             <a:r>
-              <a:rPr lang="en-US" smtClean="0"/>
+              <a:rPr lang="en-US"/>
               <a:t>Fourth level</a:t>
             </a:r>
           </a:p>
           <a:p>
             <a:pPr lvl="4"/>
             <a:r>
-              <a:rPr lang="en-US" smtClean="0"/>
+              <a:rPr lang="en-US"/>
               <a:t>Fifth level</a:t>
             </a:r>
-            <a:endParaRPr lang="en-US"/>
           </a:p>
         </p:txBody>
       </p:sp>
@@ -1669,7 +1671,7 @@
           <a:p>
             <a:pPr lvl="0"/>
             <a:r>
-              <a:rPr lang="en-US" smtClean="0"/>
+              <a:rPr lang="en-US"/>
               <a:t>Click to edit Master text styles</a:t>
             </a:r>
           </a:p>
@@ -1725,38 +1727,37 @@
           <a:p>
             <a:pPr lvl="0"/>
             <a:r>
-              <a:rPr lang="en-US" smtClean="0"/>
+              <a:rPr lang="en-US"/>
               <a:t>Click to edit Master text styles</a:t>
             </a:r>
           </a:p>
           <a:p>
             <a:pPr lvl="1"/>
             <a:r>
-              <a:rPr lang="en-US" smtClean="0"/>
+              <a:rPr lang="en-US"/>
               <a:t>Second level</a:t>
             </a:r>
           </a:p>
           <a:p>
             <a:pPr lvl="2"/>
             <a:r>
-              <a:rPr lang="en-US" smtClean="0"/>
+              <a:rPr lang="en-US"/>
               <a:t>Third level</a:t>
             </a:r>
           </a:p>
           <a:p>
             <a:pPr lvl="3"/>
             <a:r>
-              <a:rPr lang="en-US" smtClean="0"/>
+              <a:rPr lang="en-US"/>
               <a:t>Fourth level</a:t>
             </a:r>
           </a:p>
           <a:p>
             <a:pPr lvl="4"/>
             <a:r>
-              <a:rPr lang="en-US" smtClean="0"/>
+              <a:rPr lang="en-US"/>
               <a:t>Fifth level</a:t>
             </a:r>
-            <a:endParaRPr lang="en-US"/>
           </a:p>
         </p:txBody>
       </p:sp>
@@ -1777,7 +1778,7 @@
           <a:p>
             <a:fld id="{5BCAD085-E8A6-8845-BD4E-CB4CCA059FC4}" type="datetimeFigureOut">
               <a:rPr lang="en-US" smtClean="0"/>
-              <a:t>1/27/13</a:t>
+              <a:t>8/20/26</a:t>
             </a:fld>
             <a:endParaRPr lang="en-US"/>
           </a:p>
@@ -1871,10 +1872,9 @@
           <a:lstStyle/>
           <a:p>
             <a:r>
-              <a:rPr lang="en-US" smtClean="0"/>
+              <a:rPr lang="en-US"/>
               <a:t>Click to edit Master title style</a:t>
             </a:r>
-            <a:endParaRPr lang="en-US"/>
           </a:p>
         </p:txBody>
       </p:sp>
@@ -1895,7 +1895,7 @@
           <a:p>
             <a:fld id="{5BCAD085-E8A6-8845-BD4E-CB4CCA059FC4}" type="datetimeFigureOut">
               <a:rPr lang="en-US" smtClean="0"/>
-              <a:t>1/27/13</a:t>
+              <a:t>8/20/26</a:t>
             </a:fld>
             <a:endParaRPr lang="en-US"/>
           </a:p>
@@ -1990,7 +1990,7 @@
           <a:p>
             <a:fld id="{5BCAD085-E8A6-8845-BD4E-CB4CCA059FC4}" type="datetimeFigureOut">
               <a:rPr lang="en-US" smtClean="0"/>
-              <a:t>1/27/13</a:t>
+              <a:t>8/20/26</a:t>
             </a:fld>
             <a:endParaRPr lang="en-US"/>
           </a:p>
@@ -2093,10 +2093,9 @@
           </a:lstStyle>
           <a:p>
             <a:r>
-              <a:rPr lang="en-US" smtClean="0"/>
+              <a:rPr lang="en-US"/>
               <a:t>Click to edit Master title style</a:t>
             </a:r>
-            <a:endParaRPr lang="en-US"/>
           </a:p>
         </p:txBody>
       </p:sp>
@@ -2150,38 +2149,37 @@
           <a:p>
             <a:pPr lvl="0"/>
             <a:r>
-              <a:rPr lang="en-US" smtClean="0"/>
+              <a:rPr lang="en-US"/>
               <a:t>Click to edit Master text styles</a:t>
             </a:r>
           </a:p>
           <a:p>
             <a:pPr lvl="1"/>
             <a:r>
-              <a:rPr lang="en-US" smtClean="0"/>
+              <a:rPr lang="en-US"/>
               <a:t>Second level</a:t>
             </a:r>
           </a:p>
           <a:p>
             <a:pPr lvl="2"/>
             <a:r>
-              <a:rPr lang="en-US" smtClean="0"/>
+              <a:rPr lang="en-US"/>
               <a:t>Third level</a:t>
             </a:r>
           </a:p>
           <a:p>
             <a:pPr lvl="3"/>
             <a:r>
-              <a:rPr lang="en-US" smtClean="0"/>
+              <a:rPr lang="en-US"/>
               <a:t>Fourth level</a:t>
             </a:r>
           </a:p>
           <a:p>
             <a:pPr lvl="4"/>
             <a:r>
-              <a:rPr lang="en-US" smtClean="0"/>
+              <a:rPr lang="en-US"/>
               <a:t>Fifth level</a:t>
             </a:r>
-            <a:endParaRPr lang="en-US"/>
           </a:p>
         </p:txBody>
       </p:sp>
@@ -2244,7 +2242,7 @@
           <a:p>
             <a:pPr lvl="0"/>
             <a:r>
-              <a:rPr lang="en-US" smtClean="0"/>
+              <a:rPr lang="en-US"/>
               <a:t>Click to edit Master text styles</a:t>
             </a:r>
           </a:p>
@@ -2267,7 +2265,7 @@
           <a:p>
             <a:fld id="{5BCAD085-E8A6-8845-BD4E-CB4CCA059FC4}" type="datetimeFigureOut">
               <a:rPr lang="en-US" smtClean="0"/>
-              <a:t>1/27/13</a:t>
+              <a:t>8/20/26</a:t>
             </a:fld>
             <a:endParaRPr lang="en-US"/>
           </a:p>
@@ -2370,10 +2368,9 @@
           </a:lstStyle>
           <a:p>
             <a:r>
-              <a:rPr lang="en-US" smtClean="0"/>
+              <a:rPr lang="en-US"/>
               <a:t>Click to edit Master title style</a:t>
             </a:r>
-            <a:endParaRPr lang="en-US"/>
           </a:p>
         </p:txBody>
       </p:sp>
@@ -2497,7 +2494,7 @@
           <a:p>
             <a:pPr lvl="0"/>
             <a:r>
-              <a:rPr lang="en-US" smtClean="0"/>
+              <a:rPr lang="en-US"/>
               <a:t>Click to edit Master text styles</a:t>
             </a:r>
           </a:p>
@@ -2520,7 +2517,7 @@
           <a:p>
             <a:fld id="{5BCAD085-E8A6-8845-BD4E-CB4CCA059FC4}" type="datetimeFigureOut">
               <a:rPr lang="en-US" smtClean="0"/>
-              <a:t>1/27/13</a:t>
+              <a:t>8/20/26</a:t>
             </a:fld>
             <a:endParaRPr lang="en-US"/>
           </a:p>
@@ -2629,10 +2626,9 @@
           <a:lstStyle/>
           <a:p>
             <a:r>
-              <a:rPr lang="en-US" smtClean="0"/>
+              <a:rPr lang="en-US"/>
               <a:t>Click to edit Master title style</a:t>
             </a:r>
-            <a:endParaRPr lang="en-US"/>
           </a:p>
         </p:txBody>
       </p:sp>
@@ -2663,38 +2659,37 @@
           <a:p>
             <a:pPr lvl="0"/>
             <a:r>
-              <a:rPr lang="en-US" smtClean="0"/>
+              <a:rPr lang="en-US"/>
               <a:t>Click to edit Master text styles</a:t>
             </a:r>
           </a:p>
           <a:p>
             <a:pPr lvl="1"/>
             <a:r>
-              <a:rPr lang="en-US" smtClean="0"/>
+              <a:rPr lang="en-US"/>
               <a:t>Second level</a:t>
             </a:r>
           </a:p>
           <a:p>
             <a:pPr lvl="2"/>
             <a:r>
-              <a:rPr lang="en-US" smtClean="0"/>
+              <a:rPr lang="en-US"/>
               <a:t>Third level</a:t>
             </a:r>
           </a:p>
           <a:p>
             <a:pPr lvl="3"/>
             <a:r>
-              <a:rPr lang="en-US" smtClean="0"/>
+              <a:rPr lang="en-US"/>
               <a:t>Fourth level</a:t>
             </a:r>
           </a:p>
           <a:p>
             <a:pPr lvl="4"/>
             <a:r>
-              <a:rPr lang="en-US" smtClean="0"/>
+              <a:rPr lang="en-US"/>
               <a:t>Fifth level</a:t>
             </a:r>
-            <a:endParaRPr lang="en-US"/>
           </a:p>
         </p:txBody>
       </p:sp>
@@ -2733,7 +2728,7 @@
           <a:p>
             <a:fld id="{5BCAD085-E8A6-8845-BD4E-CB4CCA059FC4}" type="datetimeFigureOut">
               <a:rPr lang="en-US" smtClean="0"/>
-              <a:t>1/27/13</a:t>
+              <a:t>8/20/26</a:t>
             </a:fld>
             <a:endParaRPr lang="en-US"/>
           </a:p>
@@ -3092,7 +3087,7 @@
 </file>
 
 <file path=ppt/slides/slide1.xml><?xml version="1.0" encoding="utf-8"?>
-<p:sld xmlns:a="http://schemas.openxmlformats.org/drawingml/2006/main" xmlns:p="http://schemas.openxmlformats.org/presentationml/2006/main" xmlns:r="http://schemas.openxmlformats.org/officeDocument/2006/relationships">
+<p:sld xmlns:a="http://schemas.openxmlformats.org/drawingml/2006/main" xmlns:r="http://schemas.openxmlformats.org/officeDocument/2006/relationships" xmlns:p="http://schemas.openxmlformats.org/presentationml/2006/main">
   <p:cSld>
     <p:spTree>
       <p:nvGrpSpPr>
@@ -3100,7 +3095,14 @@
         <p:cNvGrpSpPr/>
         <p:nvPr/>
       </p:nvGrpSpPr>
-      <p:grpSpPr/>
+      <p:grpSpPr>
+        <a:xfrm>
+          <a:off x="0" y="0"/>
+          <a:ext cx="0" cy="0"/>
+          <a:chOff x="0" y="0"/>
+          <a:chExt cx="0" cy="0"/>
+        </a:xfrm>
+      </p:grpSpPr>
       <p:sp>
         <p:nvSpPr>
           <p:cNvPr id="2" name="Rectangle 1"/>
@@ -3142,6 +3144,7 @@
           <a:lstStyle/>
           <a:p>
             <a:pPr algn="ctr"/>
+            <a:endParaRPr/>
           </a:p>
         </p:txBody>
       </p:sp>
@@ -3186,6 +3189,7 @@
           <a:lstStyle/>
           <a:p>
             <a:pPr algn="ctr"/>
+            <a:endParaRPr/>
           </a:p>
         </p:txBody>
       </p:sp>
@@ -3230,6 +3234,7 @@
           <a:lstStyle/>
           <a:p>
             <a:pPr algn="ctr"/>
+            <a:endParaRPr/>
           </a:p>
         </p:txBody>
       </p:sp>
@@ -3254,13 +3259,6 @@
             <a:noFill/>
           </a:ln>
           <a:effectLst/>
-          <a:effectLst>
-            <a:outerShdw blurRad="60000" dist="25000" dir="5400000" rotWithShape="0">
-              <a:srgbClr val="1A1A2E">
-                <a:alpha val="22000"/>
-              </a:srgbClr>
-            </a:outerShdw>
-          </a:effectLst>
         </p:spPr>
         <p:style>
           <a:lnRef idx="1">
@@ -3281,6 +3279,7 @@
           <a:lstStyle/>
           <a:p>
             <a:pPr algn="ctr"/>
+            <a:endParaRPr/>
           </a:p>
         </p:txBody>
       </p:sp>
@@ -3325,6 +3324,7 @@
           <a:lstStyle/>
           <a:p>
             <a:pPr algn="ctr"/>
+            <a:endParaRPr/>
           </a:p>
         </p:txBody>
       </p:sp>
@@ -3345,7 +3345,7 @@
           <a:noFill/>
         </p:spPr>
         <p:txBody>
-          <a:bodyPr wrap="square" anchor="ctr" lIns="109728" rIns="109728" tIns="54864" bIns="54864">
+          <a:bodyPr wrap="square" lIns="109728" tIns="54864" rIns="109728" bIns="54864" anchor="ctr">
             <a:spAutoFit/>
           </a:bodyPr>
           <a:lstStyle/>
@@ -3406,7 +3406,7 @@
           <a:noFill/>
         </p:spPr>
         <p:txBody>
-          <a:bodyPr wrap="square" anchor="t" lIns="109728" rIns="109728" tIns="54864" bIns="54864">
+          <a:bodyPr wrap="square" lIns="109728" tIns="54864" rIns="109728" bIns="54864" anchor="t">
             <a:spAutoFit/>
           </a:bodyPr>
           <a:lstStyle/>
@@ -3448,7 +3448,7 @@
           <a:noFill/>
         </p:spPr>
         <p:txBody>
-          <a:bodyPr wrap="square" anchor="t" lIns="109728" rIns="109728" tIns="54864" bIns="54864">
+          <a:bodyPr wrap="square" lIns="109728" tIns="54864" rIns="109728" bIns="54864" anchor="t">
             <a:spAutoFit/>
           </a:bodyPr>
           <a:lstStyle/>
@@ -3490,7 +3490,7 @@
           <a:noFill/>
         </p:spPr>
         <p:txBody>
-          <a:bodyPr wrap="square" anchor="t" lIns="109728" rIns="109728" tIns="54864" bIns="54864">
+          <a:bodyPr wrap="square" lIns="109728" tIns="54864" rIns="109728" bIns="54864" anchor="t">
             <a:spAutoFit/>
           </a:bodyPr>
           <a:lstStyle/>
@@ -3532,7 +3532,7 @@
           <a:noFill/>
         </p:spPr>
         <p:txBody>
-          <a:bodyPr wrap="square" anchor="t" lIns="109728" rIns="109728" tIns="54864" bIns="54864">
+          <a:bodyPr wrap="square" lIns="109728" tIns="54864" rIns="109728" bIns="54864" anchor="t">
             <a:spAutoFit/>
           </a:bodyPr>
           <a:lstStyle/>
@@ -3596,7 +3596,7 @@
           </a:fontRef>
         </p:style>
         <p:txBody>
-          <a:bodyPr rtlCol="0" anchor="ctr" wrap="square" lIns="109728" rIns="109728" tIns="54864" bIns="54864"/>
+          <a:bodyPr wrap="square" lIns="109728" tIns="54864" rIns="109728" bIns="54864" rtlCol="0" anchor="ctr"/>
           <a:lstStyle/>
           <a:p>
             <a:pPr algn="ctr">
@@ -3658,7 +3658,7 @@
           </a:fontRef>
         </p:style>
         <p:txBody>
-          <a:bodyPr rtlCol="0" anchor="ctr" wrap="square" lIns="109728" rIns="109728" tIns="54864" bIns="54864"/>
+          <a:bodyPr wrap="square" lIns="109728" tIns="54864" rIns="109728" bIns="54864" rtlCol="0" anchor="ctr"/>
           <a:lstStyle/>
           <a:p>
             <a:pPr algn="ctr">
@@ -3720,7 +3720,7 @@
           </a:fontRef>
         </p:style>
         <p:txBody>
-          <a:bodyPr rtlCol="0" anchor="ctr" wrap="square" lIns="109728" rIns="109728" tIns="54864" bIns="54864"/>
+          <a:bodyPr wrap="square" lIns="109728" tIns="54864" rIns="109728" bIns="54864" rtlCol="0" anchor="ctr"/>
           <a:lstStyle/>
           <a:p>
             <a:pPr algn="ctr">
@@ -3760,7 +3760,7 @@
           <a:noFill/>
         </p:spPr>
         <p:txBody>
-          <a:bodyPr wrap="square" anchor="t" lIns="109728" rIns="109728" tIns="54864" bIns="54864">
+          <a:bodyPr wrap="square" lIns="109728" tIns="54864" rIns="109728" bIns="54864" anchor="t">
             <a:spAutoFit/>
           </a:bodyPr>
           <a:lstStyle/>
@@ -3785,6 +3785,36 @@
           </a:p>
         </p:txBody>
       </p:sp>
+      <p:pic>
+        <p:nvPicPr>
+          <p:cNvPr id="16" name="Picture 15" descr="Evolve Security 2026 Company Profile: Valuation, Funding &amp; Investors |  PitchBook">
+            <a:extLst>
+              <a:ext uri="{FF2B5EF4-FFF2-40B4-BE49-F238E27FC236}">
+                <a16:creationId xmlns:a16="http://schemas.microsoft.com/office/drawing/2014/main" id="{E0D1B6E1-1BF3-0F5B-CB32-75AC87462B00}"/>
+              </a:ext>
+            </a:extLst>
+          </p:cNvPr>
+          <p:cNvPicPr>
+            <a:picLocks noChangeAspect="1"/>
+          </p:cNvPicPr>
+          <p:nvPr/>
+        </p:nvPicPr>
+        <p:blipFill>
+          <a:blip r:embed="rId2"/>
+          <a:stretch>
+            <a:fillRect/>
+          </a:stretch>
+        </p:blipFill>
+        <p:spPr>
+          <a:xfrm>
+            <a:off x="3927856" y="-320358"/>
+            <a:ext cx="1787144" cy="1787144"/>
+          </a:xfrm>
+          <a:prstGeom prst="rect">
+            <a:avLst/>
+          </a:prstGeom>
+        </p:spPr>
+      </p:pic>
     </p:spTree>
   </p:cSld>
   <p:clrMapOvr>
@@ -3794,7 +3824,7 @@
 </file>
 
 <file path=ppt/slides/slide10.xml><?xml version="1.0" encoding="utf-8"?>
-<p:sld xmlns:a="http://schemas.openxmlformats.org/drawingml/2006/main" xmlns:p="http://schemas.openxmlformats.org/presentationml/2006/main" xmlns:r="http://schemas.openxmlformats.org/officeDocument/2006/relationships">
+<p:sld xmlns:a="http://schemas.openxmlformats.org/drawingml/2006/main" xmlns:r="http://schemas.openxmlformats.org/officeDocument/2006/relationships" xmlns:p="http://schemas.openxmlformats.org/presentationml/2006/main">
   <p:cSld>
     <p:spTree>
       <p:nvGrpSpPr>
@@ -3802,7 +3832,14 @@
         <p:cNvGrpSpPr/>
         <p:nvPr/>
       </p:nvGrpSpPr>
-      <p:grpSpPr/>
+      <p:grpSpPr>
+        <a:xfrm>
+          <a:off x="0" y="0"/>
+          <a:ext cx="0" cy="0"/>
+          <a:chOff x="0" y="0"/>
+          <a:chExt cx="0" cy="0"/>
+        </a:xfrm>
+      </p:grpSpPr>
       <p:sp>
         <p:nvSpPr>
           <p:cNvPr id="2" name="Rectangle 1"/>
@@ -3844,6 +3881,7 @@
           <a:lstStyle/>
           <a:p>
             <a:pPr algn="ctr"/>
+            <a:endParaRPr/>
           </a:p>
         </p:txBody>
       </p:sp>
@@ -3888,6 +3926,7 @@
           <a:lstStyle/>
           <a:p>
             <a:pPr algn="ctr"/>
+            <a:endParaRPr/>
           </a:p>
         </p:txBody>
       </p:sp>
@@ -3908,7 +3947,7 @@
           <a:noFill/>
         </p:spPr>
         <p:txBody>
-          <a:bodyPr wrap="square" anchor="t" lIns="109728" rIns="109728" tIns="54864" bIns="54864">
+          <a:bodyPr wrap="square" lIns="109728" tIns="54864" rIns="109728" bIns="54864" anchor="t">
             <a:spAutoFit/>
           </a:bodyPr>
           <a:lstStyle/>
@@ -3950,7 +3989,7 @@
           <a:noFill/>
         </p:spPr>
         <p:txBody>
-          <a:bodyPr wrap="square" anchor="ctr" lIns="109728" rIns="109728" tIns="54864" bIns="54864">
+          <a:bodyPr wrap="square" lIns="109728" tIns="54864" rIns="109728" bIns="54864" anchor="ctr">
             <a:spAutoFit/>
           </a:bodyPr>
           <a:lstStyle/>
@@ -4016,6 +4055,7 @@
           <a:lstStyle/>
           <a:p>
             <a:pPr algn="ctr"/>
+            <a:endParaRPr/>
           </a:p>
         </p:txBody>
       </p:sp>
@@ -4036,7 +4076,7 @@
           <a:noFill/>
         </p:spPr>
         <p:txBody>
-          <a:bodyPr wrap="square" anchor="ctr" lIns="109728" rIns="109728" tIns="54864" bIns="54864">
+          <a:bodyPr wrap="square" lIns="109728" tIns="54864" rIns="109728" bIns="54864" anchor="ctr">
             <a:spAutoFit/>
           </a:bodyPr>
           <a:lstStyle/>
@@ -4078,7 +4118,7 @@
           <a:noFill/>
         </p:spPr>
         <p:txBody>
-          <a:bodyPr wrap="square" anchor="ctr" lIns="109728" rIns="109728" tIns="54864" bIns="54864">
+          <a:bodyPr wrap="square" lIns="109728" tIns="54864" rIns="109728" bIns="54864" anchor="ctr">
             <a:spAutoFit/>
           </a:bodyPr>
           <a:lstStyle/>
@@ -4120,7 +4160,7 @@
           <a:noFill/>
         </p:spPr>
         <p:txBody>
-          <a:bodyPr wrap="square" anchor="t" lIns="109728" rIns="109728" tIns="54864" bIns="54864">
+          <a:bodyPr wrap="square" lIns="109728" tIns="54864" rIns="109728" bIns="54864" anchor="t">
             <a:spAutoFit/>
           </a:bodyPr>
           <a:lstStyle/>
@@ -4188,6 +4228,7 @@
           <a:lstStyle/>
           <a:p>
             <a:pPr algn="ctr"/>
+            <a:endParaRPr/>
           </a:p>
         </p:txBody>
       </p:sp>
@@ -4228,7 +4269,7 @@
           </a:fontRef>
         </p:style>
         <p:txBody>
-          <a:bodyPr rtlCol="0" anchor="ctr" wrap="square" lIns="109728" rIns="109728" tIns="54864" bIns="54864"/>
+          <a:bodyPr wrap="square" lIns="109728" tIns="54864" rIns="109728" bIns="54864" rtlCol="0" anchor="ctr"/>
           <a:lstStyle/>
           <a:p>
             <a:pPr algn="ctr">
@@ -4268,7 +4309,7 @@
           <a:noFill/>
         </p:spPr>
         <p:txBody>
-          <a:bodyPr wrap="square" anchor="ctr" lIns="109728" rIns="109728" tIns="54864" bIns="54864">
+          <a:bodyPr wrap="square" lIns="109728" tIns="54864" rIns="109728" bIns="54864" anchor="ctr">
             <a:spAutoFit/>
           </a:bodyPr>
           <a:lstStyle/>
@@ -4355,6 +4396,7 @@
           <a:lstStyle/>
           <a:p>
             <a:pPr algn="ctr"/>
+            <a:endParaRPr/>
           </a:p>
         </p:txBody>
       </p:sp>
@@ -4395,7 +4437,7 @@
           </a:fontRef>
         </p:style>
         <p:txBody>
-          <a:bodyPr rtlCol="0" anchor="ctr" wrap="square" lIns="109728" rIns="109728" tIns="54864" bIns="54864"/>
+          <a:bodyPr wrap="square" lIns="109728" tIns="54864" rIns="109728" bIns="54864" rtlCol="0" anchor="ctr"/>
           <a:lstStyle/>
           <a:p>
             <a:pPr algn="ctr">
@@ -4435,7 +4477,7 @@
           <a:noFill/>
         </p:spPr>
         <p:txBody>
-          <a:bodyPr wrap="square" anchor="ctr" lIns="109728" rIns="109728" tIns="54864" bIns="54864">
+          <a:bodyPr wrap="square" lIns="109728" tIns="54864" rIns="109728" bIns="54864" anchor="ctr">
             <a:spAutoFit/>
           </a:bodyPr>
           <a:lstStyle/>
@@ -4522,6 +4564,7 @@
           <a:lstStyle/>
           <a:p>
             <a:pPr algn="ctr"/>
+            <a:endParaRPr/>
           </a:p>
         </p:txBody>
       </p:sp>
@@ -4562,7 +4605,7 @@
           </a:fontRef>
         </p:style>
         <p:txBody>
-          <a:bodyPr rtlCol="0" anchor="ctr" wrap="square" lIns="109728" rIns="109728" tIns="54864" bIns="54864"/>
+          <a:bodyPr wrap="square" lIns="109728" tIns="54864" rIns="109728" bIns="54864" rtlCol="0" anchor="ctr"/>
           <a:lstStyle/>
           <a:p>
             <a:pPr algn="ctr">
@@ -4602,7 +4645,7 @@
           <a:noFill/>
         </p:spPr>
         <p:txBody>
-          <a:bodyPr wrap="square" anchor="ctr" lIns="109728" rIns="109728" tIns="54864" bIns="54864">
+          <a:bodyPr wrap="square" lIns="109728" tIns="54864" rIns="109728" bIns="54864" anchor="ctr">
             <a:spAutoFit/>
           </a:bodyPr>
           <a:lstStyle/>
@@ -4689,6 +4732,7 @@
           <a:lstStyle/>
           <a:p>
             <a:pPr algn="ctr"/>
+            <a:endParaRPr/>
           </a:p>
         </p:txBody>
       </p:sp>
@@ -4729,7 +4773,7 @@
           </a:fontRef>
         </p:style>
         <p:txBody>
-          <a:bodyPr rtlCol="0" anchor="ctr" wrap="square" lIns="109728" rIns="109728" tIns="54864" bIns="54864"/>
+          <a:bodyPr wrap="square" lIns="109728" tIns="54864" rIns="109728" bIns="54864" rtlCol="0" anchor="ctr"/>
           <a:lstStyle/>
           <a:p>
             <a:pPr algn="ctr">
@@ -4769,7 +4813,7 @@
           <a:noFill/>
         </p:spPr>
         <p:txBody>
-          <a:bodyPr wrap="square" anchor="ctr" lIns="109728" rIns="109728" tIns="54864" bIns="54864">
+          <a:bodyPr wrap="square" lIns="109728" tIns="54864" rIns="109728" bIns="54864" anchor="ctr">
             <a:spAutoFit/>
           </a:bodyPr>
           <a:lstStyle/>
@@ -4822,7 +4866,7 @@
 </file>
 
 <file path=ppt/slides/slide11.xml><?xml version="1.0" encoding="utf-8"?>
-<p:sld xmlns:a="http://schemas.openxmlformats.org/drawingml/2006/main" xmlns:p="http://schemas.openxmlformats.org/presentationml/2006/main" xmlns:r="http://schemas.openxmlformats.org/officeDocument/2006/relationships">
+<p:sld xmlns:a="http://schemas.openxmlformats.org/drawingml/2006/main" xmlns:r="http://schemas.openxmlformats.org/officeDocument/2006/relationships" xmlns:p="http://schemas.openxmlformats.org/presentationml/2006/main">
   <p:cSld>
     <p:spTree>
       <p:nvGrpSpPr>
@@ -4830,7 +4874,14 @@
         <p:cNvGrpSpPr/>
         <p:nvPr/>
       </p:nvGrpSpPr>
-      <p:grpSpPr/>
+      <p:grpSpPr>
+        <a:xfrm>
+          <a:off x="0" y="0"/>
+          <a:ext cx="0" cy="0"/>
+          <a:chOff x="0" y="0"/>
+          <a:chExt cx="0" cy="0"/>
+        </a:xfrm>
+      </p:grpSpPr>
       <p:sp>
         <p:nvSpPr>
           <p:cNvPr id="2" name="Rectangle 1"/>
@@ -4872,6 +4923,7 @@
           <a:lstStyle/>
           <a:p>
             <a:pPr algn="ctr"/>
+            <a:endParaRPr/>
           </a:p>
         </p:txBody>
       </p:sp>
@@ -4916,6 +4968,7 @@
           <a:lstStyle/>
           <a:p>
             <a:pPr algn="ctr"/>
+            <a:endParaRPr/>
           </a:p>
         </p:txBody>
       </p:sp>
@@ -4936,7 +4989,7 @@
           <a:noFill/>
         </p:spPr>
         <p:txBody>
-          <a:bodyPr wrap="square" anchor="t" lIns="109728" rIns="109728" tIns="54864" bIns="54864">
+          <a:bodyPr wrap="square" lIns="109728" tIns="54864" rIns="109728" bIns="54864" anchor="t">
             <a:spAutoFit/>
           </a:bodyPr>
           <a:lstStyle/>
@@ -4978,7 +5031,7 @@
           <a:noFill/>
         </p:spPr>
         <p:txBody>
-          <a:bodyPr wrap="square" anchor="ctr" lIns="109728" rIns="109728" tIns="54864" bIns="54864">
+          <a:bodyPr wrap="square" lIns="109728" tIns="54864" rIns="109728" bIns="54864" anchor="ctr">
             <a:spAutoFit/>
           </a:bodyPr>
           <a:lstStyle/>
@@ -5044,6 +5097,7 @@
           <a:lstStyle/>
           <a:p>
             <a:pPr algn="ctr"/>
+            <a:endParaRPr/>
           </a:p>
         </p:txBody>
       </p:sp>
@@ -5064,7 +5118,7 @@
           <a:noFill/>
         </p:spPr>
         <p:txBody>
-          <a:bodyPr wrap="square" anchor="ctr" lIns="109728" rIns="109728" tIns="54864" bIns="54864">
+          <a:bodyPr wrap="square" lIns="109728" tIns="54864" rIns="109728" bIns="54864" anchor="ctr">
             <a:spAutoFit/>
           </a:bodyPr>
           <a:lstStyle/>
@@ -5106,7 +5160,7 @@
           <a:noFill/>
         </p:spPr>
         <p:txBody>
-          <a:bodyPr wrap="square" anchor="ctr" lIns="109728" rIns="109728" tIns="54864" bIns="54864">
+          <a:bodyPr wrap="square" lIns="109728" tIns="54864" rIns="109728" bIns="54864" anchor="ctr">
             <a:spAutoFit/>
           </a:bodyPr>
           <a:lstStyle/>
@@ -5156,13 +5210,6 @@
             </a:solidFill>
           </a:ln>
           <a:effectLst/>
-          <a:effectLst>
-            <a:outerShdw blurRad="60000" dist="25000" dir="5400000" rotWithShape="0">
-              <a:srgbClr val="1A1A2E">
-                <a:alpha val="22000"/>
-              </a:srgbClr>
-            </a:outerShdw>
-          </a:effectLst>
         </p:spPr>
         <p:style>
           <a:lnRef idx="1">
@@ -5183,6 +5230,7 @@
           <a:lstStyle/>
           <a:p>
             <a:pPr algn="ctr"/>
+            <a:endParaRPr/>
           </a:p>
         </p:txBody>
       </p:sp>
@@ -5227,6 +5275,7 @@
           <a:lstStyle/>
           <a:p>
             <a:pPr algn="ctr"/>
+            <a:endParaRPr/>
           </a:p>
         </p:txBody>
       </p:sp>
@@ -5247,7 +5296,7 @@
           <a:noFill/>
         </p:spPr>
         <p:txBody>
-          <a:bodyPr wrap="square" anchor="ctr" lIns="109728" rIns="109728" tIns="54864" bIns="54864">
+          <a:bodyPr wrap="square" lIns="109728" tIns="54864" rIns="109728" bIns="54864" anchor="ctr">
             <a:spAutoFit/>
           </a:bodyPr>
           <a:lstStyle/>
@@ -5289,7 +5338,7 @@
           <a:noFill/>
         </p:spPr>
         <p:txBody>
-          <a:bodyPr wrap="square" anchor="ctr" lIns="109728" rIns="109728" tIns="54864" bIns="54864">
+          <a:bodyPr wrap="square" lIns="109728" tIns="54864" rIns="109728" bIns="54864" anchor="ctr">
             <a:spAutoFit/>
           </a:bodyPr>
           <a:lstStyle/>
@@ -5355,6 +5404,7 @@
           <a:lstStyle/>
           <a:p>
             <a:pPr algn="ctr"/>
+            <a:endParaRPr/>
           </a:p>
         </p:txBody>
       </p:sp>
@@ -5383,13 +5433,6 @@
             </a:solidFill>
           </a:ln>
           <a:effectLst/>
-          <a:effectLst>
-            <a:outerShdw blurRad="60000" dist="25000" dir="5400000" rotWithShape="0">
-              <a:srgbClr val="1A1A2E">
-                <a:alpha val="22000"/>
-              </a:srgbClr>
-            </a:outerShdw>
-          </a:effectLst>
         </p:spPr>
         <p:style>
           <a:lnRef idx="1">
@@ -5410,6 +5453,7 @@
           <a:lstStyle/>
           <a:p>
             <a:pPr algn="ctr"/>
+            <a:endParaRPr/>
           </a:p>
         </p:txBody>
       </p:sp>
@@ -5454,6 +5498,7 @@
           <a:lstStyle/>
           <a:p>
             <a:pPr algn="ctr"/>
+            <a:endParaRPr/>
           </a:p>
         </p:txBody>
       </p:sp>
@@ -5474,7 +5519,7 @@
           <a:noFill/>
         </p:spPr>
         <p:txBody>
-          <a:bodyPr wrap="square" anchor="ctr" lIns="109728" rIns="109728" tIns="54864" bIns="54864">
+          <a:bodyPr wrap="square" lIns="109728" tIns="54864" rIns="109728" bIns="54864" anchor="ctr">
             <a:spAutoFit/>
           </a:bodyPr>
           <a:lstStyle/>
@@ -5516,7 +5561,7 @@
           <a:noFill/>
         </p:spPr>
         <p:txBody>
-          <a:bodyPr wrap="square" anchor="ctr" lIns="109728" rIns="109728" tIns="54864" bIns="54864">
+          <a:bodyPr wrap="square" lIns="109728" tIns="54864" rIns="109728" bIns="54864" anchor="ctr">
             <a:spAutoFit/>
           </a:bodyPr>
           <a:lstStyle/>
@@ -5582,6 +5627,7 @@
           <a:lstStyle/>
           <a:p>
             <a:pPr algn="ctr"/>
+            <a:endParaRPr/>
           </a:p>
         </p:txBody>
       </p:sp>
@@ -5610,13 +5656,6 @@
             </a:solidFill>
           </a:ln>
           <a:effectLst/>
-          <a:effectLst>
-            <a:outerShdw blurRad="60000" dist="25000" dir="5400000" rotWithShape="0">
-              <a:srgbClr val="1A1A2E">
-                <a:alpha val="22000"/>
-              </a:srgbClr>
-            </a:outerShdw>
-          </a:effectLst>
         </p:spPr>
         <p:style>
           <a:lnRef idx="1">
@@ -5637,6 +5676,7 @@
           <a:lstStyle/>
           <a:p>
             <a:pPr algn="ctr"/>
+            <a:endParaRPr/>
           </a:p>
         </p:txBody>
       </p:sp>
@@ -5681,6 +5721,7 @@
           <a:lstStyle/>
           <a:p>
             <a:pPr algn="ctr"/>
+            <a:endParaRPr/>
           </a:p>
         </p:txBody>
       </p:sp>
@@ -5701,7 +5742,7 @@
           <a:noFill/>
         </p:spPr>
         <p:txBody>
-          <a:bodyPr wrap="square" anchor="ctr" lIns="109728" rIns="109728" tIns="54864" bIns="54864">
+          <a:bodyPr wrap="square" lIns="109728" tIns="54864" rIns="109728" bIns="54864" anchor="ctr">
             <a:spAutoFit/>
           </a:bodyPr>
           <a:lstStyle/>
@@ -5743,7 +5784,7 @@
           <a:noFill/>
         </p:spPr>
         <p:txBody>
-          <a:bodyPr wrap="square" anchor="ctr" lIns="109728" rIns="109728" tIns="54864" bIns="54864">
+          <a:bodyPr wrap="square" lIns="109728" tIns="54864" rIns="109728" bIns="54864" anchor="ctr">
             <a:spAutoFit/>
           </a:bodyPr>
           <a:lstStyle/>
@@ -5785,7 +5826,7 @@
           <a:noFill/>
         </p:spPr>
         <p:txBody>
-          <a:bodyPr wrap="square" anchor="t" lIns="109728" rIns="109728" tIns="54864" bIns="54864">
+          <a:bodyPr wrap="square" lIns="109728" tIns="54864" rIns="109728" bIns="54864" anchor="t">
             <a:spAutoFit/>
           </a:bodyPr>
           <a:lstStyle/>
@@ -5819,7 +5860,7 @@
 </file>
 
 <file path=ppt/slides/slide12.xml><?xml version="1.0" encoding="utf-8"?>
-<p:sld xmlns:a="http://schemas.openxmlformats.org/drawingml/2006/main" xmlns:p="http://schemas.openxmlformats.org/presentationml/2006/main" xmlns:r="http://schemas.openxmlformats.org/officeDocument/2006/relationships">
+<p:sld xmlns:a="http://schemas.openxmlformats.org/drawingml/2006/main" xmlns:r="http://schemas.openxmlformats.org/officeDocument/2006/relationships" xmlns:p="http://schemas.openxmlformats.org/presentationml/2006/main">
   <p:cSld>
     <p:spTree>
       <p:nvGrpSpPr>
@@ -5827,7 +5868,14 @@
         <p:cNvGrpSpPr/>
         <p:nvPr/>
       </p:nvGrpSpPr>
-      <p:grpSpPr/>
+      <p:grpSpPr>
+        <a:xfrm>
+          <a:off x="0" y="0"/>
+          <a:ext cx="0" cy="0"/>
+          <a:chOff x="0" y="0"/>
+          <a:chExt cx="0" cy="0"/>
+        </a:xfrm>
+      </p:grpSpPr>
       <p:sp>
         <p:nvSpPr>
           <p:cNvPr id="2" name="Rectangle 1"/>
@@ -5869,6 +5917,7 @@
           <a:lstStyle/>
           <a:p>
             <a:pPr algn="ctr"/>
+            <a:endParaRPr/>
           </a:p>
         </p:txBody>
       </p:sp>
@@ -5913,6 +5962,7 @@
           <a:lstStyle/>
           <a:p>
             <a:pPr algn="ctr"/>
+            <a:endParaRPr/>
           </a:p>
         </p:txBody>
       </p:sp>
@@ -5933,7 +5983,7 @@
           <a:noFill/>
         </p:spPr>
         <p:txBody>
-          <a:bodyPr wrap="square" anchor="t" lIns="109728" rIns="109728" tIns="54864" bIns="54864">
+          <a:bodyPr wrap="square" lIns="109728" tIns="54864" rIns="109728" bIns="54864" anchor="t">
             <a:spAutoFit/>
           </a:bodyPr>
           <a:lstStyle/>
@@ -5975,7 +6025,7 @@
           <a:noFill/>
         </p:spPr>
         <p:txBody>
-          <a:bodyPr wrap="square" anchor="ctr" lIns="109728" rIns="109728" tIns="54864" bIns="54864">
+          <a:bodyPr wrap="square" lIns="109728" tIns="54864" rIns="109728" bIns="54864" anchor="ctr">
             <a:spAutoFit/>
           </a:bodyPr>
           <a:lstStyle/>
@@ -6041,6 +6091,7 @@
           <a:lstStyle/>
           <a:p>
             <a:pPr algn="ctr"/>
+            <a:endParaRPr/>
           </a:p>
         </p:txBody>
       </p:sp>
@@ -6061,7 +6112,7 @@
           <a:noFill/>
         </p:spPr>
         <p:txBody>
-          <a:bodyPr wrap="square" anchor="ctr" lIns="109728" rIns="109728" tIns="54864" bIns="54864">
+          <a:bodyPr wrap="square" lIns="109728" tIns="54864" rIns="109728" bIns="54864" anchor="ctr">
             <a:spAutoFit/>
           </a:bodyPr>
           <a:lstStyle/>
@@ -6103,7 +6154,7 @@
           <a:noFill/>
         </p:spPr>
         <p:txBody>
-          <a:bodyPr wrap="square" anchor="ctr" lIns="109728" rIns="109728" tIns="54864" bIns="54864">
+          <a:bodyPr wrap="square" lIns="109728" tIns="54864" rIns="109728" bIns="54864" anchor="ctr">
             <a:spAutoFit/>
           </a:bodyPr>
           <a:lstStyle/>
@@ -6153,13 +6204,6 @@
             </a:solidFill>
           </a:ln>
           <a:effectLst/>
-          <a:effectLst>
-            <a:outerShdw blurRad="60000" dist="25000" dir="5400000" rotWithShape="0">
-              <a:srgbClr val="1A1A2E">
-                <a:alpha val="22000"/>
-              </a:srgbClr>
-            </a:outerShdw>
-          </a:effectLst>
         </p:spPr>
         <p:style>
           <a:lnRef idx="1">
@@ -6180,6 +6224,7 @@
           <a:lstStyle/>
           <a:p>
             <a:pPr algn="ctr"/>
+            <a:endParaRPr/>
           </a:p>
         </p:txBody>
       </p:sp>
@@ -6200,7 +6245,7 @@
           <a:noFill/>
         </p:spPr>
         <p:txBody>
-          <a:bodyPr wrap="square" anchor="ctr" lIns="109728" rIns="109728" tIns="54864" bIns="54864">
+          <a:bodyPr wrap="square" lIns="109728" tIns="54864" rIns="109728" bIns="54864" anchor="ctr">
             <a:spAutoFit/>
           </a:bodyPr>
           <a:lstStyle/>
@@ -6242,7 +6287,7 @@
           <a:noFill/>
         </p:spPr>
         <p:txBody>
-          <a:bodyPr wrap="square" anchor="ctr" lIns="109728" rIns="109728" tIns="54864" bIns="54864">
+          <a:bodyPr wrap="square" lIns="109728" tIns="54864" rIns="109728" bIns="54864" anchor="ctr">
             <a:spAutoFit/>
           </a:bodyPr>
           <a:lstStyle/>
@@ -6292,13 +6337,6 @@
             </a:solidFill>
           </a:ln>
           <a:effectLst/>
-          <a:effectLst>
-            <a:outerShdw blurRad="60000" dist="25000" dir="5400000" rotWithShape="0">
-              <a:srgbClr val="1A1A2E">
-                <a:alpha val="22000"/>
-              </a:srgbClr>
-            </a:outerShdw>
-          </a:effectLst>
         </p:spPr>
         <p:style>
           <a:lnRef idx="1">
@@ -6319,6 +6357,7 @@
           <a:lstStyle/>
           <a:p>
             <a:pPr algn="ctr"/>
+            <a:endParaRPr/>
           </a:p>
         </p:txBody>
       </p:sp>
@@ -6339,7 +6378,7 @@
           <a:noFill/>
         </p:spPr>
         <p:txBody>
-          <a:bodyPr wrap="square" anchor="ctr" lIns="109728" rIns="109728" tIns="54864" bIns="54864">
+          <a:bodyPr wrap="square" lIns="109728" tIns="54864" rIns="109728" bIns="54864" anchor="ctr">
             <a:spAutoFit/>
           </a:bodyPr>
           <a:lstStyle/>
@@ -6381,7 +6420,7 @@
           <a:noFill/>
         </p:spPr>
         <p:txBody>
-          <a:bodyPr wrap="square" anchor="ctr" lIns="109728" rIns="109728" tIns="54864" bIns="54864">
+          <a:bodyPr wrap="square" lIns="109728" tIns="54864" rIns="109728" bIns="54864" anchor="ctr">
             <a:spAutoFit/>
           </a:bodyPr>
           <a:lstStyle/>
@@ -6431,13 +6470,6 @@
             </a:solidFill>
           </a:ln>
           <a:effectLst/>
-          <a:effectLst>
-            <a:outerShdw blurRad="60000" dist="25000" dir="5400000" rotWithShape="0">
-              <a:srgbClr val="1A1A2E">
-                <a:alpha val="22000"/>
-              </a:srgbClr>
-            </a:outerShdw>
-          </a:effectLst>
         </p:spPr>
         <p:style>
           <a:lnRef idx="1">
@@ -6458,6 +6490,7 @@
           <a:lstStyle/>
           <a:p>
             <a:pPr algn="ctr"/>
+            <a:endParaRPr/>
           </a:p>
         </p:txBody>
       </p:sp>
@@ -6478,7 +6511,7 @@
           <a:noFill/>
         </p:spPr>
         <p:txBody>
-          <a:bodyPr wrap="square" anchor="ctr" lIns="109728" rIns="109728" tIns="54864" bIns="54864">
+          <a:bodyPr wrap="square" lIns="109728" tIns="54864" rIns="109728" bIns="54864" anchor="ctr">
             <a:spAutoFit/>
           </a:bodyPr>
           <a:lstStyle/>
@@ -6520,7 +6553,7 @@
           <a:noFill/>
         </p:spPr>
         <p:txBody>
-          <a:bodyPr wrap="square" anchor="ctr" lIns="109728" rIns="109728" tIns="54864" bIns="54864">
+          <a:bodyPr wrap="square" lIns="109728" tIns="54864" rIns="109728" bIns="54864" anchor="ctr">
             <a:spAutoFit/>
           </a:bodyPr>
           <a:lstStyle/>
@@ -6562,7 +6595,7 @@
           <a:noFill/>
         </p:spPr>
         <p:txBody>
-          <a:bodyPr wrap="square" anchor="t" lIns="109728" rIns="109728" tIns="54864" bIns="54864">
+          <a:bodyPr wrap="square" lIns="109728" tIns="54864" rIns="109728" bIns="54864" anchor="t">
             <a:spAutoFit/>
           </a:bodyPr>
           <a:lstStyle/>
@@ -6596,7 +6629,7 @@
 </file>
 
 <file path=ppt/slides/slide13.xml><?xml version="1.0" encoding="utf-8"?>
-<p:sld xmlns:a="http://schemas.openxmlformats.org/drawingml/2006/main" xmlns:p="http://schemas.openxmlformats.org/presentationml/2006/main" xmlns:r="http://schemas.openxmlformats.org/officeDocument/2006/relationships">
+<p:sld xmlns:a="http://schemas.openxmlformats.org/drawingml/2006/main" xmlns:r="http://schemas.openxmlformats.org/officeDocument/2006/relationships" xmlns:p="http://schemas.openxmlformats.org/presentationml/2006/main">
   <p:cSld>
     <p:spTree>
       <p:nvGrpSpPr>
@@ -6604,7 +6637,14 @@
         <p:cNvGrpSpPr/>
         <p:nvPr/>
       </p:nvGrpSpPr>
-      <p:grpSpPr/>
+      <p:grpSpPr>
+        <a:xfrm>
+          <a:off x="0" y="0"/>
+          <a:ext cx="0" cy="0"/>
+          <a:chOff x="0" y="0"/>
+          <a:chExt cx="0" cy="0"/>
+        </a:xfrm>
+      </p:grpSpPr>
       <p:sp>
         <p:nvSpPr>
           <p:cNvPr id="2" name="Rectangle 1"/>
@@ -6646,6 +6686,7 @@
           <a:lstStyle/>
           <a:p>
             <a:pPr algn="ctr"/>
+            <a:endParaRPr/>
           </a:p>
         </p:txBody>
       </p:sp>
@@ -6690,6 +6731,7 @@
           <a:lstStyle/>
           <a:p>
             <a:pPr algn="ctr"/>
+            <a:endParaRPr/>
           </a:p>
         </p:txBody>
       </p:sp>
@@ -6710,7 +6752,7 @@
           <a:noFill/>
         </p:spPr>
         <p:txBody>
-          <a:bodyPr wrap="square" anchor="t" lIns="109728" rIns="109728" tIns="54864" bIns="54864">
+          <a:bodyPr wrap="square" lIns="109728" tIns="54864" rIns="109728" bIns="54864" anchor="t">
             <a:spAutoFit/>
           </a:bodyPr>
           <a:lstStyle/>
@@ -6752,7 +6794,7 @@
           <a:noFill/>
         </p:spPr>
         <p:txBody>
-          <a:bodyPr wrap="square" anchor="ctr" lIns="109728" rIns="109728" tIns="54864" bIns="54864">
+          <a:bodyPr wrap="square" lIns="109728" tIns="54864" rIns="109728" bIns="54864" anchor="ctr">
             <a:spAutoFit/>
           </a:bodyPr>
           <a:lstStyle/>
@@ -6818,6 +6860,7 @@
           <a:lstStyle/>
           <a:p>
             <a:pPr algn="ctr"/>
+            <a:endParaRPr/>
           </a:p>
         </p:txBody>
       </p:sp>
@@ -6838,7 +6881,7 @@
           <a:noFill/>
         </p:spPr>
         <p:txBody>
-          <a:bodyPr wrap="square" anchor="ctr" lIns="109728" rIns="109728" tIns="54864" bIns="54864">
+          <a:bodyPr wrap="square" lIns="109728" tIns="54864" rIns="109728" bIns="54864" anchor="ctr">
             <a:spAutoFit/>
           </a:bodyPr>
           <a:lstStyle/>
@@ -6880,7 +6923,7 @@
           <a:noFill/>
         </p:spPr>
         <p:txBody>
-          <a:bodyPr wrap="square" anchor="ctr" lIns="109728" rIns="109728" tIns="54864" bIns="54864">
+          <a:bodyPr wrap="square" lIns="109728" tIns="54864" rIns="109728" bIns="54864" anchor="ctr">
             <a:spAutoFit/>
           </a:bodyPr>
           <a:lstStyle/>
@@ -6950,6 +6993,7 @@
           <a:lstStyle/>
           <a:p>
             <a:pPr algn="ctr"/>
+            <a:endParaRPr/>
           </a:p>
         </p:txBody>
       </p:sp>
@@ -6990,7 +7034,7 @@
           </a:fontRef>
         </p:style>
         <p:txBody>
-          <a:bodyPr rtlCol="0" anchor="ctr" wrap="square" lIns="109728" rIns="109728" tIns="54864" bIns="54864"/>
+          <a:bodyPr wrap="square" lIns="109728" tIns="54864" rIns="109728" bIns="54864" rtlCol="0" anchor="ctr"/>
           <a:lstStyle/>
           <a:p>
             <a:pPr algn="ctr">
@@ -7030,7 +7074,7 @@
           <a:noFill/>
         </p:spPr>
         <p:txBody>
-          <a:bodyPr wrap="square" anchor="ctr" lIns="109728" rIns="109728" tIns="54864" bIns="54864">
+          <a:bodyPr wrap="square" lIns="109728" tIns="54864" rIns="109728" bIns="54864" anchor="ctr">
             <a:spAutoFit/>
           </a:bodyPr>
           <a:lstStyle/>
@@ -7100,6 +7144,7 @@
           <a:lstStyle/>
           <a:p>
             <a:pPr algn="ctr"/>
+            <a:endParaRPr/>
           </a:p>
         </p:txBody>
       </p:sp>
@@ -7140,7 +7185,7 @@
           </a:fontRef>
         </p:style>
         <p:txBody>
-          <a:bodyPr rtlCol="0" anchor="ctr" wrap="square" lIns="109728" rIns="109728" tIns="54864" bIns="54864"/>
+          <a:bodyPr wrap="square" lIns="109728" tIns="54864" rIns="109728" bIns="54864" rtlCol="0" anchor="ctr"/>
           <a:lstStyle/>
           <a:p>
             <a:pPr algn="ctr">
@@ -7180,7 +7225,7 @@
           <a:noFill/>
         </p:spPr>
         <p:txBody>
-          <a:bodyPr wrap="square" anchor="ctr" lIns="109728" rIns="109728" tIns="54864" bIns="54864">
+          <a:bodyPr wrap="square" lIns="109728" tIns="54864" rIns="109728" bIns="54864" anchor="ctr">
             <a:spAutoFit/>
           </a:bodyPr>
           <a:lstStyle/>
@@ -7250,6 +7295,7 @@
           <a:lstStyle/>
           <a:p>
             <a:pPr algn="ctr"/>
+            <a:endParaRPr/>
           </a:p>
         </p:txBody>
       </p:sp>
@@ -7290,7 +7336,7 @@
           </a:fontRef>
         </p:style>
         <p:txBody>
-          <a:bodyPr rtlCol="0" anchor="ctr" wrap="square" lIns="109728" rIns="109728" tIns="54864" bIns="54864"/>
+          <a:bodyPr wrap="square" lIns="109728" tIns="54864" rIns="109728" bIns="54864" rtlCol="0" anchor="ctr"/>
           <a:lstStyle/>
           <a:p>
             <a:pPr algn="ctr">
@@ -7330,7 +7376,7 @@
           <a:noFill/>
         </p:spPr>
         <p:txBody>
-          <a:bodyPr wrap="square" anchor="ctr" lIns="109728" rIns="109728" tIns="54864" bIns="54864">
+          <a:bodyPr wrap="square" lIns="109728" tIns="54864" rIns="109728" bIns="54864" anchor="ctr">
             <a:spAutoFit/>
           </a:bodyPr>
           <a:lstStyle/>
@@ -7400,6 +7446,7 @@
           <a:lstStyle/>
           <a:p>
             <a:pPr algn="ctr"/>
+            <a:endParaRPr/>
           </a:p>
         </p:txBody>
       </p:sp>
@@ -7440,7 +7487,7 @@
           </a:fontRef>
         </p:style>
         <p:txBody>
-          <a:bodyPr rtlCol="0" anchor="ctr" wrap="square" lIns="109728" rIns="109728" tIns="54864" bIns="54864"/>
+          <a:bodyPr wrap="square" lIns="109728" tIns="54864" rIns="109728" bIns="54864" rtlCol="0" anchor="ctr"/>
           <a:lstStyle/>
           <a:p>
             <a:pPr algn="ctr">
@@ -7480,7 +7527,7 @@
           <a:noFill/>
         </p:spPr>
         <p:txBody>
-          <a:bodyPr wrap="square" anchor="ctr" lIns="109728" rIns="109728" tIns="54864" bIns="54864">
+          <a:bodyPr wrap="square" lIns="109728" tIns="54864" rIns="109728" bIns="54864" anchor="ctr">
             <a:spAutoFit/>
           </a:bodyPr>
           <a:lstStyle/>
@@ -7550,6 +7597,7 @@
           <a:lstStyle/>
           <a:p>
             <a:pPr algn="ctr"/>
+            <a:endParaRPr/>
           </a:p>
         </p:txBody>
       </p:sp>
@@ -7590,7 +7638,7 @@
           </a:fontRef>
         </p:style>
         <p:txBody>
-          <a:bodyPr rtlCol="0" anchor="ctr" wrap="square" lIns="109728" rIns="109728" tIns="54864" bIns="54864"/>
+          <a:bodyPr wrap="square" lIns="109728" tIns="54864" rIns="109728" bIns="54864" rtlCol="0" anchor="ctr"/>
           <a:lstStyle/>
           <a:p>
             <a:pPr algn="ctr">
@@ -7630,7 +7678,7 @@
           <a:noFill/>
         </p:spPr>
         <p:txBody>
-          <a:bodyPr wrap="square" anchor="ctr" lIns="109728" rIns="109728" tIns="54864" bIns="54864">
+          <a:bodyPr wrap="square" lIns="109728" tIns="54864" rIns="109728" bIns="54864" anchor="ctr">
             <a:spAutoFit/>
           </a:bodyPr>
           <a:lstStyle/>
@@ -7664,7 +7712,7 @@
 </file>
 
 <file path=ppt/slides/slide14.xml><?xml version="1.0" encoding="utf-8"?>
-<p:sld xmlns:a="http://schemas.openxmlformats.org/drawingml/2006/main" xmlns:p="http://schemas.openxmlformats.org/presentationml/2006/main" xmlns:r="http://schemas.openxmlformats.org/officeDocument/2006/relationships">
+<p:sld xmlns:a="http://schemas.openxmlformats.org/drawingml/2006/main" xmlns:r="http://schemas.openxmlformats.org/officeDocument/2006/relationships" xmlns:p="http://schemas.openxmlformats.org/presentationml/2006/main">
   <p:cSld>
     <p:spTree>
       <p:nvGrpSpPr>
@@ -7672,7 +7720,14 @@
         <p:cNvGrpSpPr/>
         <p:nvPr/>
       </p:nvGrpSpPr>
-      <p:grpSpPr/>
+      <p:grpSpPr>
+        <a:xfrm>
+          <a:off x="0" y="0"/>
+          <a:ext cx="0" cy="0"/>
+          <a:chOff x="0" y="0"/>
+          <a:chExt cx="0" cy="0"/>
+        </a:xfrm>
+      </p:grpSpPr>
       <p:sp>
         <p:nvSpPr>
           <p:cNvPr id="2" name="Rectangle 1"/>
@@ -7714,6 +7769,7 @@
           <a:lstStyle/>
           <a:p>
             <a:pPr algn="ctr"/>
+            <a:endParaRPr/>
           </a:p>
         </p:txBody>
       </p:sp>
@@ -7758,6 +7814,7 @@
           <a:lstStyle/>
           <a:p>
             <a:pPr algn="ctr"/>
+            <a:endParaRPr/>
           </a:p>
         </p:txBody>
       </p:sp>
@@ -7802,6 +7859,7 @@
           <a:lstStyle/>
           <a:p>
             <a:pPr algn="ctr"/>
+            <a:endParaRPr/>
           </a:p>
         </p:txBody>
       </p:sp>
@@ -7822,7 +7880,7 @@
           <a:noFill/>
         </p:spPr>
         <p:txBody>
-          <a:bodyPr wrap="square" anchor="t" lIns="109728" rIns="109728" tIns="54864" bIns="54864">
+          <a:bodyPr wrap="square" lIns="109728" tIns="54864" rIns="109728" bIns="54864" anchor="t">
             <a:spAutoFit/>
           </a:bodyPr>
           <a:lstStyle/>
@@ -7864,7 +7922,7 @@
           <a:noFill/>
         </p:spPr>
         <p:txBody>
-          <a:bodyPr wrap="square" anchor="t" lIns="109728" rIns="109728" tIns="54864" bIns="54864">
+          <a:bodyPr wrap="square" lIns="109728" tIns="54864" rIns="109728" bIns="54864" anchor="t">
             <a:spAutoFit/>
           </a:bodyPr>
           <a:lstStyle/>
@@ -7928,7 +7986,7 @@
           </a:fontRef>
         </p:style>
         <p:txBody>
-          <a:bodyPr rtlCol="0" anchor="ctr" wrap="square" lIns="109728" rIns="109728" tIns="54864" bIns="54864"/>
+          <a:bodyPr wrap="square" lIns="109728" tIns="54864" rIns="109728" bIns="54864" rtlCol="0" anchor="ctr"/>
           <a:lstStyle/>
           <a:p>
             <a:pPr algn="ctr">
@@ -7960,7 +8018,7 @@
 </file>
 
 <file path=ppt/slides/slide2.xml><?xml version="1.0" encoding="utf-8"?>
-<p:sld xmlns:a="http://schemas.openxmlformats.org/drawingml/2006/main" xmlns:p="http://schemas.openxmlformats.org/presentationml/2006/main" xmlns:r="http://schemas.openxmlformats.org/officeDocument/2006/relationships">
+<p:sld xmlns:a="http://schemas.openxmlformats.org/drawingml/2006/main" xmlns:r="http://schemas.openxmlformats.org/officeDocument/2006/relationships" xmlns:p="http://schemas.openxmlformats.org/presentationml/2006/main">
   <p:cSld>
     <p:spTree>
       <p:nvGrpSpPr>
@@ -7968,7 +8026,14 @@
         <p:cNvGrpSpPr/>
         <p:nvPr/>
       </p:nvGrpSpPr>
-      <p:grpSpPr/>
+      <p:grpSpPr>
+        <a:xfrm>
+          <a:off x="0" y="0"/>
+          <a:ext cx="0" cy="0"/>
+          <a:chOff x="0" y="0"/>
+          <a:chExt cx="0" cy="0"/>
+        </a:xfrm>
+      </p:grpSpPr>
       <p:sp>
         <p:nvSpPr>
           <p:cNvPr id="2" name="Rectangle 1"/>
@@ -8010,6 +8075,7 @@
           <a:lstStyle/>
           <a:p>
             <a:pPr algn="ctr"/>
+            <a:endParaRPr/>
           </a:p>
         </p:txBody>
       </p:sp>
@@ -8054,6 +8120,7 @@
           <a:lstStyle/>
           <a:p>
             <a:pPr algn="ctr"/>
+            <a:endParaRPr/>
           </a:p>
         </p:txBody>
       </p:sp>
@@ -8074,7 +8141,7 @@
           <a:noFill/>
         </p:spPr>
         <p:txBody>
-          <a:bodyPr wrap="square" anchor="t" lIns="109728" rIns="109728" tIns="54864" bIns="54864">
+          <a:bodyPr wrap="square" lIns="109728" tIns="54864" rIns="109728" bIns="54864" anchor="t">
             <a:spAutoFit/>
           </a:bodyPr>
           <a:lstStyle/>
@@ -8116,7 +8183,7 @@
           <a:noFill/>
         </p:spPr>
         <p:txBody>
-          <a:bodyPr wrap="square" anchor="ctr" lIns="109728" rIns="109728" tIns="54864" bIns="54864">
+          <a:bodyPr wrap="square" lIns="109728" tIns="54864" rIns="109728" bIns="54864" anchor="ctr">
             <a:spAutoFit/>
           </a:bodyPr>
           <a:lstStyle/>
@@ -8182,6 +8249,7 @@
           <a:lstStyle/>
           <a:p>
             <a:pPr algn="ctr"/>
+            <a:endParaRPr/>
           </a:p>
         </p:txBody>
       </p:sp>
@@ -8202,7 +8270,7 @@
           <a:noFill/>
         </p:spPr>
         <p:txBody>
-          <a:bodyPr wrap="square" anchor="ctr" lIns="109728" rIns="109728" tIns="54864" bIns="54864">
+          <a:bodyPr wrap="square" lIns="109728" tIns="54864" rIns="109728" bIns="54864" anchor="ctr">
             <a:spAutoFit/>
           </a:bodyPr>
           <a:lstStyle/>
@@ -8244,7 +8312,7 @@
           <a:noFill/>
         </p:spPr>
         <p:txBody>
-          <a:bodyPr wrap="square" anchor="ctr" lIns="109728" rIns="109728" tIns="54864" bIns="54864">
+          <a:bodyPr wrap="square" lIns="109728" tIns="54864" rIns="109728" bIns="54864" anchor="ctr">
             <a:spAutoFit/>
           </a:bodyPr>
           <a:lstStyle/>
@@ -8292,13 +8360,6 @@
             <a:noFill/>
           </a:ln>
           <a:effectLst/>
-          <a:effectLst>
-            <a:outerShdw blurRad="60000" dist="25000" dir="5400000" rotWithShape="0">
-              <a:srgbClr val="1A1A2E">
-                <a:alpha val="22000"/>
-              </a:srgbClr>
-            </a:outerShdw>
-          </a:effectLst>
         </p:spPr>
         <p:style>
           <a:lnRef idx="1">
@@ -8319,6 +8380,7 @@
           <a:lstStyle/>
           <a:p>
             <a:pPr algn="ctr"/>
+            <a:endParaRPr/>
           </a:p>
         </p:txBody>
       </p:sp>
@@ -8339,7 +8401,7 @@
           <a:noFill/>
         </p:spPr>
         <p:txBody>
-          <a:bodyPr wrap="square" anchor="ctr" lIns="109728" rIns="109728" tIns="54864" bIns="54864">
+          <a:bodyPr wrap="square" lIns="109728" tIns="54864" rIns="109728" bIns="54864" anchor="ctr">
             <a:spAutoFit/>
           </a:bodyPr>
           <a:lstStyle/>
@@ -8381,7 +8443,7 @@
           <a:noFill/>
         </p:spPr>
         <p:txBody>
-          <a:bodyPr wrap="square" anchor="ctr" lIns="109728" rIns="109728" tIns="54864" bIns="54864">
+          <a:bodyPr wrap="square" lIns="109728" tIns="54864" rIns="109728" bIns="54864" anchor="ctr">
             <a:spAutoFit/>
           </a:bodyPr>
           <a:lstStyle/>
@@ -8429,13 +8491,6 @@
             <a:noFill/>
           </a:ln>
           <a:effectLst/>
-          <a:effectLst>
-            <a:outerShdw blurRad="60000" dist="25000" dir="5400000" rotWithShape="0">
-              <a:srgbClr val="1A1A2E">
-                <a:alpha val="22000"/>
-              </a:srgbClr>
-            </a:outerShdw>
-          </a:effectLst>
         </p:spPr>
         <p:style>
           <a:lnRef idx="1">
@@ -8456,6 +8511,7 @@
           <a:lstStyle/>
           <a:p>
             <a:pPr algn="ctr"/>
+            <a:endParaRPr/>
           </a:p>
         </p:txBody>
       </p:sp>
@@ -8476,7 +8532,7 @@
           <a:noFill/>
         </p:spPr>
         <p:txBody>
-          <a:bodyPr wrap="square" anchor="ctr" lIns="109728" rIns="109728" tIns="54864" bIns="54864">
+          <a:bodyPr wrap="square" lIns="109728" tIns="54864" rIns="109728" bIns="54864" anchor="ctr">
             <a:spAutoFit/>
           </a:bodyPr>
           <a:lstStyle/>
@@ -8518,7 +8574,7 @@
           <a:noFill/>
         </p:spPr>
         <p:txBody>
-          <a:bodyPr wrap="square" anchor="ctr" lIns="109728" rIns="109728" tIns="54864" bIns="54864">
+          <a:bodyPr wrap="square" lIns="109728" tIns="54864" rIns="109728" bIns="54864" anchor="ctr">
             <a:spAutoFit/>
           </a:bodyPr>
           <a:lstStyle/>
@@ -8566,13 +8622,6 @@
             <a:noFill/>
           </a:ln>
           <a:effectLst/>
-          <a:effectLst>
-            <a:outerShdw blurRad="60000" dist="25000" dir="5400000" rotWithShape="0">
-              <a:srgbClr val="1A1A2E">
-                <a:alpha val="22000"/>
-              </a:srgbClr>
-            </a:outerShdw>
-          </a:effectLst>
         </p:spPr>
         <p:style>
           <a:lnRef idx="1">
@@ -8593,6 +8642,7 @@
           <a:lstStyle/>
           <a:p>
             <a:pPr algn="ctr"/>
+            <a:endParaRPr/>
           </a:p>
         </p:txBody>
       </p:sp>
@@ -8613,7 +8663,7 @@
           <a:noFill/>
         </p:spPr>
         <p:txBody>
-          <a:bodyPr wrap="square" anchor="ctr" lIns="109728" rIns="109728" tIns="54864" bIns="54864">
+          <a:bodyPr wrap="square" lIns="109728" tIns="54864" rIns="109728" bIns="54864" anchor="ctr">
             <a:spAutoFit/>
           </a:bodyPr>
           <a:lstStyle/>
@@ -8655,7 +8705,7 @@
           <a:noFill/>
         </p:spPr>
         <p:txBody>
-          <a:bodyPr wrap="square" anchor="ctr" lIns="109728" rIns="109728" tIns="54864" bIns="54864">
+          <a:bodyPr wrap="square" lIns="109728" tIns="54864" rIns="109728" bIns="54864" anchor="ctr">
             <a:spAutoFit/>
           </a:bodyPr>
           <a:lstStyle/>
@@ -8697,7 +8747,7 @@
           <a:noFill/>
         </p:spPr>
         <p:txBody>
-          <a:bodyPr wrap="square" anchor="t" lIns="109728" rIns="109728" tIns="54864" bIns="54864">
+          <a:bodyPr wrap="square" lIns="109728" tIns="54864" rIns="109728" bIns="54864" anchor="t">
             <a:spAutoFit/>
           </a:bodyPr>
           <a:lstStyle/>
@@ -8765,6 +8815,7 @@
           <a:lstStyle/>
           <a:p>
             <a:pPr algn="ctr"/>
+            <a:endParaRPr/>
           </a:p>
         </p:txBody>
       </p:sp>
@@ -8807,7 +8858,7 @@
           </a:fontRef>
         </p:style>
         <p:txBody>
-          <a:bodyPr rtlCol="0" anchor="ctr" wrap="square" lIns="109728" rIns="109728" tIns="54864" bIns="54864"/>
+          <a:bodyPr wrap="square" lIns="109728" tIns="54864" rIns="109728" bIns="54864" rtlCol="0" anchor="ctr"/>
           <a:lstStyle/>
           <a:p>
             <a:pPr algn="ctr">
@@ -8847,7 +8898,7 @@
           <a:noFill/>
         </p:spPr>
         <p:txBody>
-          <a:bodyPr wrap="square" anchor="ctr" lIns="109728" rIns="109728" tIns="54864" bIns="54864">
+          <a:bodyPr wrap="square" lIns="109728" tIns="54864" rIns="109728" bIns="54864" anchor="ctr">
             <a:spAutoFit/>
           </a:bodyPr>
           <a:lstStyle/>
@@ -8915,6 +8966,7 @@
           <a:lstStyle/>
           <a:p>
             <a:pPr algn="ctr"/>
+            <a:endParaRPr/>
           </a:p>
         </p:txBody>
       </p:sp>
@@ -8957,7 +9009,7 @@
           </a:fontRef>
         </p:style>
         <p:txBody>
-          <a:bodyPr rtlCol="0" anchor="ctr" wrap="square" lIns="109728" rIns="109728" tIns="54864" bIns="54864"/>
+          <a:bodyPr wrap="square" lIns="109728" tIns="54864" rIns="109728" bIns="54864" rtlCol="0" anchor="ctr"/>
           <a:lstStyle/>
           <a:p>
             <a:pPr algn="ctr">
@@ -8997,7 +9049,7 @@
           <a:noFill/>
         </p:spPr>
         <p:txBody>
-          <a:bodyPr wrap="square" anchor="ctr" lIns="109728" rIns="109728" tIns="54864" bIns="54864">
+          <a:bodyPr wrap="square" lIns="109728" tIns="54864" rIns="109728" bIns="54864" anchor="ctr">
             <a:spAutoFit/>
           </a:bodyPr>
           <a:lstStyle/>
@@ -9065,6 +9117,7 @@
           <a:lstStyle/>
           <a:p>
             <a:pPr algn="ctr"/>
+            <a:endParaRPr/>
           </a:p>
         </p:txBody>
       </p:sp>
@@ -9107,7 +9160,7 @@
           </a:fontRef>
         </p:style>
         <p:txBody>
-          <a:bodyPr rtlCol="0" anchor="ctr" wrap="square" lIns="109728" rIns="109728" tIns="54864" bIns="54864"/>
+          <a:bodyPr wrap="square" lIns="109728" tIns="54864" rIns="109728" bIns="54864" rtlCol="0" anchor="ctr"/>
           <a:lstStyle/>
           <a:p>
             <a:pPr algn="ctr">
@@ -9147,7 +9200,7 @@
           <a:noFill/>
         </p:spPr>
         <p:txBody>
-          <a:bodyPr wrap="square" anchor="ctr" lIns="109728" rIns="109728" tIns="54864" bIns="54864">
+          <a:bodyPr wrap="square" lIns="109728" tIns="54864" rIns="109728" bIns="54864" anchor="ctr">
             <a:spAutoFit/>
           </a:bodyPr>
           <a:lstStyle/>
@@ -9215,6 +9268,7 @@
           <a:lstStyle/>
           <a:p>
             <a:pPr algn="ctr"/>
+            <a:endParaRPr/>
           </a:p>
         </p:txBody>
       </p:sp>
@@ -9257,7 +9311,7 @@
           </a:fontRef>
         </p:style>
         <p:txBody>
-          <a:bodyPr rtlCol="0" anchor="ctr" wrap="square" lIns="109728" rIns="109728" tIns="54864" bIns="54864"/>
+          <a:bodyPr wrap="square" lIns="109728" tIns="54864" rIns="109728" bIns="54864" rtlCol="0" anchor="ctr"/>
           <a:lstStyle/>
           <a:p>
             <a:pPr algn="ctr">
@@ -9297,7 +9351,7 @@
           <a:noFill/>
         </p:spPr>
         <p:txBody>
-          <a:bodyPr wrap="square" anchor="ctr" lIns="109728" rIns="109728" tIns="54864" bIns="54864">
+          <a:bodyPr wrap="square" lIns="109728" tIns="54864" rIns="109728" bIns="54864" anchor="ctr">
             <a:spAutoFit/>
           </a:bodyPr>
           <a:lstStyle/>
@@ -9365,6 +9419,7 @@
           <a:lstStyle/>
           <a:p>
             <a:pPr algn="ctr"/>
+            <a:endParaRPr/>
           </a:p>
         </p:txBody>
       </p:sp>
@@ -9407,7 +9462,7 @@
           </a:fontRef>
         </p:style>
         <p:txBody>
-          <a:bodyPr rtlCol="0" anchor="ctr" wrap="square" lIns="109728" rIns="109728" tIns="54864" bIns="54864"/>
+          <a:bodyPr wrap="square" lIns="109728" tIns="54864" rIns="109728" bIns="54864" rtlCol="0" anchor="ctr"/>
           <a:lstStyle/>
           <a:p>
             <a:pPr algn="ctr">
@@ -9447,7 +9502,7 @@
           <a:noFill/>
         </p:spPr>
         <p:txBody>
-          <a:bodyPr wrap="square" anchor="ctr" lIns="109728" rIns="109728" tIns="54864" bIns="54864">
+          <a:bodyPr wrap="square" lIns="109728" tIns="54864" rIns="109728" bIns="54864" anchor="ctr">
             <a:spAutoFit/>
           </a:bodyPr>
           <a:lstStyle/>
@@ -9481,7 +9536,7 @@
 </file>
 
 <file path=ppt/slides/slide3.xml><?xml version="1.0" encoding="utf-8"?>
-<p:sld xmlns:a="http://schemas.openxmlformats.org/drawingml/2006/main" xmlns:p="http://schemas.openxmlformats.org/presentationml/2006/main" xmlns:r="http://schemas.openxmlformats.org/officeDocument/2006/relationships">
+<p:sld xmlns:a="http://schemas.openxmlformats.org/drawingml/2006/main" xmlns:r="http://schemas.openxmlformats.org/officeDocument/2006/relationships" xmlns:p="http://schemas.openxmlformats.org/presentationml/2006/main">
   <p:cSld>
     <p:spTree>
       <p:nvGrpSpPr>
@@ -9489,7 +9544,14 @@
         <p:cNvGrpSpPr/>
         <p:nvPr/>
       </p:nvGrpSpPr>
-      <p:grpSpPr/>
+      <p:grpSpPr>
+        <a:xfrm>
+          <a:off x="0" y="0"/>
+          <a:ext cx="0" cy="0"/>
+          <a:chOff x="0" y="0"/>
+          <a:chExt cx="0" cy="0"/>
+        </a:xfrm>
+      </p:grpSpPr>
       <p:sp>
         <p:nvSpPr>
           <p:cNvPr id="2" name="Rectangle 1"/>
@@ -9531,6 +9593,7 @@
           <a:lstStyle/>
           <a:p>
             <a:pPr algn="ctr"/>
+            <a:endParaRPr/>
           </a:p>
         </p:txBody>
       </p:sp>
@@ -9575,6 +9638,7 @@
           <a:lstStyle/>
           <a:p>
             <a:pPr algn="ctr"/>
+            <a:endParaRPr/>
           </a:p>
         </p:txBody>
       </p:sp>
@@ -9595,7 +9659,7 @@
           <a:noFill/>
         </p:spPr>
         <p:txBody>
-          <a:bodyPr wrap="square" anchor="t" lIns="109728" rIns="109728" tIns="54864" bIns="54864">
+          <a:bodyPr wrap="square" lIns="109728" tIns="54864" rIns="109728" bIns="54864" anchor="t">
             <a:spAutoFit/>
           </a:bodyPr>
           <a:lstStyle/>
@@ -9637,7 +9701,7 @@
           <a:noFill/>
         </p:spPr>
         <p:txBody>
-          <a:bodyPr wrap="square" anchor="ctr" lIns="109728" rIns="109728" tIns="54864" bIns="54864">
+          <a:bodyPr wrap="square" lIns="109728" tIns="54864" rIns="109728" bIns="54864" anchor="ctr">
             <a:spAutoFit/>
           </a:bodyPr>
           <a:lstStyle/>
@@ -9703,6 +9767,7 @@
           <a:lstStyle/>
           <a:p>
             <a:pPr algn="ctr"/>
+            <a:endParaRPr/>
           </a:p>
         </p:txBody>
       </p:sp>
@@ -9723,7 +9788,7 @@
           <a:noFill/>
         </p:spPr>
         <p:txBody>
-          <a:bodyPr wrap="square" anchor="ctr" lIns="109728" rIns="109728" tIns="54864" bIns="54864">
+          <a:bodyPr wrap="square" lIns="109728" tIns="54864" rIns="109728" bIns="54864" anchor="ctr">
             <a:spAutoFit/>
           </a:bodyPr>
           <a:lstStyle/>
@@ -9765,7 +9830,7 @@
           <a:noFill/>
         </p:spPr>
         <p:txBody>
-          <a:bodyPr wrap="square" anchor="ctr" lIns="109728" rIns="109728" tIns="54864" bIns="54864">
+          <a:bodyPr wrap="square" lIns="109728" tIns="54864" rIns="109728" bIns="54864" anchor="ctr">
             <a:spAutoFit/>
           </a:bodyPr>
           <a:lstStyle/>
@@ -9835,6 +9900,7 @@
           <a:lstStyle/>
           <a:p>
             <a:pPr algn="ctr"/>
+            <a:endParaRPr/>
           </a:p>
         </p:txBody>
       </p:sp>
@@ -9855,7 +9921,7 @@
           <a:noFill/>
         </p:spPr>
         <p:txBody>
-          <a:bodyPr wrap="square" anchor="ctr" lIns="109728" rIns="109728" tIns="54864" bIns="54864">
+          <a:bodyPr wrap="square" lIns="109728" tIns="54864" rIns="109728" bIns="54864" anchor="ctr">
             <a:spAutoFit/>
           </a:bodyPr>
           <a:lstStyle/>
@@ -9897,7 +9963,7 @@
           <a:noFill/>
         </p:spPr>
         <p:txBody>
-          <a:bodyPr wrap="square" anchor="ctr" lIns="109728" rIns="109728" tIns="54864" bIns="54864">
+          <a:bodyPr wrap="square" lIns="109728" tIns="54864" rIns="109728" bIns="54864" anchor="ctr">
             <a:spAutoFit/>
           </a:bodyPr>
           <a:lstStyle/>
@@ -9967,6 +10033,7 @@
           <a:lstStyle/>
           <a:p>
             <a:pPr algn="ctr"/>
+            <a:endParaRPr/>
           </a:p>
         </p:txBody>
       </p:sp>
@@ -9987,7 +10054,7 @@
           <a:noFill/>
         </p:spPr>
         <p:txBody>
-          <a:bodyPr wrap="square" anchor="ctr" lIns="109728" rIns="109728" tIns="54864" bIns="54864">
+          <a:bodyPr wrap="square" lIns="109728" tIns="54864" rIns="109728" bIns="54864" anchor="ctr">
             <a:spAutoFit/>
           </a:bodyPr>
           <a:lstStyle/>
@@ -10029,7 +10096,7 @@
           <a:noFill/>
         </p:spPr>
         <p:txBody>
-          <a:bodyPr wrap="square" anchor="ctr" lIns="109728" rIns="109728" tIns="54864" bIns="54864">
+          <a:bodyPr wrap="square" lIns="109728" tIns="54864" rIns="109728" bIns="54864" anchor="ctr">
             <a:spAutoFit/>
           </a:bodyPr>
           <a:lstStyle/>
@@ -10099,6 +10166,7 @@
           <a:lstStyle/>
           <a:p>
             <a:pPr algn="ctr"/>
+            <a:endParaRPr/>
           </a:p>
         </p:txBody>
       </p:sp>
@@ -10119,7 +10187,7 @@
           <a:noFill/>
         </p:spPr>
         <p:txBody>
-          <a:bodyPr wrap="square" anchor="ctr" lIns="109728" rIns="109728" tIns="54864" bIns="54864">
+          <a:bodyPr wrap="square" lIns="109728" tIns="54864" rIns="109728" bIns="54864" anchor="ctr">
             <a:spAutoFit/>
           </a:bodyPr>
           <a:lstStyle/>
@@ -10161,7 +10229,7 @@
           <a:noFill/>
         </p:spPr>
         <p:txBody>
-          <a:bodyPr wrap="square" anchor="ctr" lIns="109728" rIns="109728" tIns="54864" bIns="54864">
+          <a:bodyPr wrap="square" lIns="109728" tIns="54864" rIns="109728" bIns="54864" anchor="ctr">
             <a:spAutoFit/>
           </a:bodyPr>
           <a:lstStyle/>
@@ -10231,6 +10299,7 @@
           <a:lstStyle/>
           <a:p>
             <a:pPr algn="ctr"/>
+            <a:endParaRPr/>
           </a:p>
         </p:txBody>
       </p:sp>
@@ -10251,7 +10320,7 @@
           <a:noFill/>
         </p:spPr>
         <p:txBody>
-          <a:bodyPr wrap="square" anchor="ctr" lIns="109728" rIns="109728" tIns="54864" bIns="54864">
+          <a:bodyPr wrap="square" lIns="109728" tIns="54864" rIns="109728" bIns="54864" anchor="ctr">
             <a:spAutoFit/>
           </a:bodyPr>
           <a:lstStyle/>
@@ -10293,7 +10362,7 @@
           <a:noFill/>
         </p:spPr>
         <p:txBody>
-          <a:bodyPr wrap="square" anchor="ctr" lIns="109728" rIns="109728" tIns="54864" bIns="54864">
+          <a:bodyPr wrap="square" lIns="109728" tIns="54864" rIns="109728" bIns="54864" anchor="ctr">
             <a:spAutoFit/>
           </a:bodyPr>
           <a:lstStyle/>
@@ -10343,13 +10412,6 @@
             </a:solidFill>
           </a:ln>
           <a:effectLst/>
-          <a:effectLst>
-            <a:outerShdw blurRad="60000" dist="25000" dir="5400000" rotWithShape="0">
-              <a:srgbClr val="1A1A2E">
-                <a:alpha val="22000"/>
-              </a:srgbClr>
-            </a:outerShdw>
-          </a:effectLst>
         </p:spPr>
         <p:style>
           <a:lnRef idx="1">
@@ -10370,6 +10432,7 @@
           <a:lstStyle/>
           <a:p>
             <a:pPr algn="ctr"/>
+            <a:endParaRPr/>
           </a:p>
         </p:txBody>
       </p:sp>
@@ -10390,7 +10453,7 @@
           <a:noFill/>
         </p:spPr>
         <p:txBody>
-          <a:bodyPr wrap="square" anchor="ctr" lIns="109728" rIns="109728" tIns="54864" bIns="54864">
+          <a:bodyPr wrap="square" lIns="109728" tIns="54864" rIns="109728" bIns="54864" anchor="ctr">
             <a:spAutoFit/>
           </a:bodyPr>
           <a:lstStyle/>
@@ -10432,7 +10495,7 @@
           <a:noFill/>
         </p:spPr>
         <p:txBody>
-          <a:bodyPr wrap="square" anchor="ctr" lIns="109728" rIns="109728" tIns="54864" bIns="54864">
+          <a:bodyPr wrap="square" lIns="109728" tIns="54864" rIns="109728" bIns="54864" anchor="ctr">
             <a:spAutoFit/>
           </a:bodyPr>
           <a:lstStyle/>
@@ -10474,7 +10537,7 @@
           <a:noFill/>
         </p:spPr>
         <p:txBody>
-          <a:bodyPr wrap="square" anchor="t" lIns="109728" rIns="109728" tIns="54864" bIns="54864">
+          <a:bodyPr wrap="square" lIns="109728" tIns="54864" rIns="109728" bIns="54864" anchor="t">
             <a:spAutoFit/>
           </a:bodyPr>
           <a:lstStyle/>
@@ -10508,7 +10571,7 @@
 </file>
 
 <file path=ppt/slides/slide4.xml><?xml version="1.0" encoding="utf-8"?>
-<p:sld xmlns:a="http://schemas.openxmlformats.org/drawingml/2006/main" xmlns:p="http://schemas.openxmlformats.org/presentationml/2006/main" xmlns:r="http://schemas.openxmlformats.org/officeDocument/2006/relationships">
+<p:sld xmlns:a="http://schemas.openxmlformats.org/drawingml/2006/main" xmlns:r="http://schemas.openxmlformats.org/officeDocument/2006/relationships" xmlns:p="http://schemas.openxmlformats.org/presentationml/2006/main">
   <p:cSld>
     <p:spTree>
       <p:nvGrpSpPr>
@@ -10516,7 +10579,14 @@
         <p:cNvGrpSpPr/>
         <p:nvPr/>
       </p:nvGrpSpPr>
-      <p:grpSpPr/>
+      <p:grpSpPr>
+        <a:xfrm>
+          <a:off x="0" y="0"/>
+          <a:ext cx="0" cy="0"/>
+          <a:chOff x="0" y="0"/>
+          <a:chExt cx="0" cy="0"/>
+        </a:xfrm>
+      </p:grpSpPr>
       <p:sp>
         <p:nvSpPr>
           <p:cNvPr id="2" name="Rectangle 1"/>
@@ -10558,6 +10628,7 @@
           <a:lstStyle/>
           <a:p>
             <a:pPr algn="ctr"/>
+            <a:endParaRPr/>
           </a:p>
         </p:txBody>
       </p:sp>
@@ -10602,6 +10673,7 @@
           <a:lstStyle/>
           <a:p>
             <a:pPr algn="ctr"/>
+            <a:endParaRPr/>
           </a:p>
         </p:txBody>
       </p:sp>
@@ -10613,7 +10685,7 @@
         </p:nvSpPr>
         <p:spPr>
           <a:xfrm>
-            <a:off x="914400" y="2194560"/>
+            <a:off x="914400" y="1303020"/>
             <a:ext cx="10332720" cy="457200"/>
           </a:xfrm>
           <a:prstGeom prst="rect">
@@ -10622,7 +10694,7 @@
           <a:noFill/>
         </p:spPr>
         <p:txBody>
-          <a:bodyPr wrap="square" anchor="t" lIns="109728" rIns="109728" tIns="54864" bIns="54864">
+          <a:bodyPr wrap="square" lIns="109728" tIns="54864" rIns="109728" bIns="54864" anchor="t">
             <a:spAutoFit/>
           </a:bodyPr>
           <a:lstStyle/>
@@ -10636,7 +10708,7 @@
               </a:spcAft>
             </a:pPr>
             <a:r>
-              <a:rPr sz="1400" b="1">
+              <a:rPr sz="1400" b="1" dirty="0">
                 <a:solidFill>
                   <a:srgbClr val="F2C01E"/>
                 </a:solidFill>
@@ -10655,7 +10727,7 @@
         </p:nvSpPr>
         <p:spPr>
           <a:xfrm>
-            <a:off x="914400" y="2651760"/>
+            <a:off x="914400" y="2331720"/>
             <a:ext cx="10332720" cy="1097280"/>
           </a:xfrm>
           <a:prstGeom prst="rect">
@@ -10664,7 +10736,7 @@
           <a:noFill/>
         </p:spPr>
         <p:txBody>
-          <a:bodyPr wrap="square" anchor="t" lIns="109728" rIns="109728" tIns="54864" bIns="54864">
+          <a:bodyPr wrap="square" lIns="109728" tIns="54864" rIns="109728" bIns="54864" anchor="t">
             <a:spAutoFit/>
           </a:bodyPr>
           <a:lstStyle/>
@@ -10678,7 +10750,7 @@
               </a:spcAft>
             </a:pPr>
             <a:r>
-              <a:rPr sz="4000" b="1">
+              <a:rPr sz="4000" b="1" dirty="0">
                 <a:solidFill>
                   <a:srgbClr val="FFFFFF"/>
                 </a:solidFill>
@@ -10706,7 +10778,7 @@
           <a:noFill/>
         </p:spPr>
         <p:txBody>
-          <a:bodyPr wrap="square" anchor="t" lIns="109728" rIns="109728" tIns="54864" bIns="54864">
+          <a:bodyPr wrap="square" lIns="109728" tIns="54864" rIns="109728" bIns="54864" anchor="t">
             <a:spAutoFit/>
           </a:bodyPr>
           <a:lstStyle/>
@@ -10740,7 +10812,7 @@
 </file>
 
 <file path=ppt/slides/slide5.xml><?xml version="1.0" encoding="utf-8"?>
-<p:sld xmlns:a="http://schemas.openxmlformats.org/drawingml/2006/main" xmlns:p="http://schemas.openxmlformats.org/presentationml/2006/main" xmlns:r="http://schemas.openxmlformats.org/officeDocument/2006/relationships">
+<p:sld xmlns:a="http://schemas.openxmlformats.org/drawingml/2006/main" xmlns:r="http://schemas.openxmlformats.org/officeDocument/2006/relationships" xmlns:p="http://schemas.openxmlformats.org/presentationml/2006/main">
   <p:cSld>
     <p:spTree>
       <p:nvGrpSpPr>
@@ -10748,7 +10820,14 @@
         <p:cNvGrpSpPr/>
         <p:nvPr/>
       </p:nvGrpSpPr>
-      <p:grpSpPr/>
+      <p:grpSpPr>
+        <a:xfrm>
+          <a:off x="0" y="0"/>
+          <a:ext cx="0" cy="0"/>
+          <a:chOff x="0" y="0"/>
+          <a:chExt cx="0" cy="0"/>
+        </a:xfrm>
+      </p:grpSpPr>
       <p:sp>
         <p:nvSpPr>
           <p:cNvPr id="2" name="Rectangle 1"/>
@@ -10790,6 +10869,7 @@
           <a:lstStyle/>
           <a:p>
             <a:pPr algn="ctr"/>
+            <a:endParaRPr/>
           </a:p>
         </p:txBody>
       </p:sp>
@@ -10834,6 +10914,7 @@
           <a:lstStyle/>
           <a:p>
             <a:pPr algn="ctr"/>
+            <a:endParaRPr/>
           </a:p>
         </p:txBody>
       </p:sp>
@@ -10854,7 +10935,7 @@
           <a:noFill/>
         </p:spPr>
         <p:txBody>
-          <a:bodyPr wrap="square" anchor="t" lIns="109728" rIns="109728" tIns="54864" bIns="54864">
+          <a:bodyPr wrap="square" lIns="109728" tIns="54864" rIns="109728" bIns="54864" anchor="t">
             <a:spAutoFit/>
           </a:bodyPr>
           <a:lstStyle/>
@@ -10896,7 +10977,7 @@
           <a:noFill/>
         </p:spPr>
         <p:txBody>
-          <a:bodyPr wrap="square" anchor="ctr" lIns="109728" rIns="109728" tIns="54864" bIns="54864">
+          <a:bodyPr wrap="square" lIns="109728" tIns="54864" rIns="109728" bIns="54864" anchor="ctr">
             <a:spAutoFit/>
           </a:bodyPr>
           <a:lstStyle/>
@@ -10962,6 +11043,7 @@
           <a:lstStyle/>
           <a:p>
             <a:pPr algn="ctr"/>
+            <a:endParaRPr/>
           </a:p>
         </p:txBody>
       </p:sp>
@@ -10982,7 +11064,7 @@
           <a:noFill/>
         </p:spPr>
         <p:txBody>
-          <a:bodyPr wrap="square" anchor="ctr" lIns="109728" rIns="109728" tIns="54864" bIns="54864">
+          <a:bodyPr wrap="square" lIns="109728" tIns="54864" rIns="109728" bIns="54864" anchor="ctr">
             <a:spAutoFit/>
           </a:bodyPr>
           <a:lstStyle/>
@@ -11024,7 +11106,7 @@
           <a:noFill/>
         </p:spPr>
         <p:txBody>
-          <a:bodyPr wrap="square" anchor="ctr" lIns="109728" rIns="109728" tIns="54864" bIns="54864">
+          <a:bodyPr wrap="square" lIns="109728" tIns="54864" rIns="109728" bIns="54864" anchor="ctr">
             <a:spAutoFit/>
           </a:bodyPr>
           <a:lstStyle/>
@@ -11070,13 +11152,6 @@
             <a:noFill/>
           </a:ln>
           <a:effectLst/>
-          <a:effectLst>
-            <a:outerShdw blurRad="60000" dist="25000" dir="5400000" rotWithShape="0">
-              <a:srgbClr val="1A1A2E">
-                <a:alpha val="22000"/>
-              </a:srgbClr>
-            </a:outerShdw>
-          </a:effectLst>
         </p:spPr>
         <p:style>
           <a:lnRef idx="1">
@@ -11097,6 +11172,7 @@
           <a:lstStyle/>
           <a:p>
             <a:pPr algn="ctr"/>
+            <a:endParaRPr/>
           </a:p>
         </p:txBody>
       </p:sp>
@@ -11117,7 +11193,7 @@
           <a:noFill/>
         </p:spPr>
         <p:txBody>
-          <a:bodyPr wrap="square" anchor="ctr" lIns="109728" rIns="109728" tIns="54864" bIns="54864">
+          <a:bodyPr wrap="square" lIns="109728" tIns="54864" rIns="109728" bIns="54864" anchor="ctr">
             <a:spAutoFit/>
           </a:bodyPr>
           <a:lstStyle/>
@@ -11182,13 +11258,6 @@
             <a:noFill/>
           </a:ln>
           <a:effectLst/>
-          <a:effectLst>
-            <a:outerShdw blurRad="60000" dist="25000" dir="5400000" rotWithShape="0">
-              <a:srgbClr val="1A1A2E">
-                <a:alpha val="22000"/>
-              </a:srgbClr>
-            </a:outerShdw>
-          </a:effectLst>
         </p:spPr>
         <p:style>
           <a:lnRef idx="1">
@@ -11209,6 +11278,7 @@
           <a:lstStyle/>
           <a:p>
             <a:pPr algn="ctr"/>
+            <a:endParaRPr/>
           </a:p>
         </p:txBody>
       </p:sp>
@@ -11229,7 +11299,7 @@
           <a:noFill/>
         </p:spPr>
         <p:txBody>
-          <a:bodyPr wrap="square" anchor="ctr" lIns="109728" rIns="109728" tIns="54864" bIns="54864">
+          <a:bodyPr wrap="square" lIns="109728" tIns="54864" rIns="109728" bIns="54864" anchor="ctr">
             <a:spAutoFit/>
           </a:bodyPr>
           <a:lstStyle/>
@@ -11294,13 +11364,6 @@
             <a:noFill/>
           </a:ln>
           <a:effectLst/>
-          <a:effectLst>
-            <a:outerShdw blurRad="60000" dist="25000" dir="5400000" rotWithShape="0">
-              <a:srgbClr val="1A1A2E">
-                <a:alpha val="22000"/>
-              </a:srgbClr>
-            </a:outerShdw>
-          </a:effectLst>
         </p:spPr>
         <p:style>
           <a:lnRef idx="1">
@@ -11321,6 +11384,7 @@
           <a:lstStyle/>
           <a:p>
             <a:pPr algn="ctr"/>
+            <a:endParaRPr/>
           </a:p>
         </p:txBody>
       </p:sp>
@@ -11341,7 +11405,7 @@
           <a:noFill/>
         </p:spPr>
         <p:txBody>
-          <a:bodyPr wrap="square" anchor="ctr" lIns="109728" rIns="109728" tIns="54864" bIns="54864">
+          <a:bodyPr wrap="square" lIns="109728" tIns="54864" rIns="109728" bIns="54864" anchor="ctr">
             <a:spAutoFit/>
           </a:bodyPr>
           <a:lstStyle/>
@@ -11406,13 +11470,6 @@
             <a:noFill/>
           </a:ln>
           <a:effectLst/>
-          <a:effectLst>
-            <a:outerShdw blurRad="60000" dist="25000" dir="5400000" rotWithShape="0">
-              <a:srgbClr val="1A1A2E">
-                <a:alpha val="22000"/>
-              </a:srgbClr>
-            </a:outerShdw>
-          </a:effectLst>
         </p:spPr>
         <p:style>
           <a:lnRef idx="1">
@@ -11433,6 +11490,7 @@
           <a:lstStyle/>
           <a:p>
             <a:pPr algn="ctr"/>
+            <a:endParaRPr/>
           </a:p>
         </p:txBody>
       </p:sp>
@@ -11453,7 +11511,7 @@
           <a:noFill/>
         </p:spPr>
         <p:txBody>
-          <a:bodyPr wrap="square" anchor="ctr" lIns="109728" rIns="109728" tIns="54864" bIns="54864">
+          <a:bodyPr wrap="square" lIns="109728" tIns="54864" rIns="109728" bIns="54864" anchor="ctr">
             <a:spAutoFit/>
           </a:bodyPr>
           <a:lstStyle/>
@@ -11514,7 +11572,7 @@
           <a:noFill/>
         </p:spPr>
         <p:txBody>
-          <a:bodyPr wrap="square" anchor="t" lIns="109728" rIns="109728" tIns="54864" bIns="54864">
+          <a:bodyPr wrap="square" lIns="109728" tIns="54864" rIns="109728" bIns="54864" anchor="t">
             <a:spAutoFit/>
           </a:bodyPr>
           <a:lstStyle/>
@@ -11548,7 +11606,7 @@
 </file>
 
 <file path=ppt/slides/slide6.xml><?xml version="1.0" encoding="utf-8"?>
-<p:sld xmlns:a="http://schemas.openxmlformats.org/drawingml/2006/main" xmlns:p="http://schemas.openxmlformats.org/presentationml/2006/main" xmlns:r="http://schemas.openxmlformats.org/officeDocument/2006/relationships">
+<p:sld xmlns:a="http://schemas.openxmlformats.org/drawingml/2006/main" xmlns:r="http://schemas.openxmlformats.org/officeDocument/2006/relationships" xmlns:p="http://schemas.openxmlformats.org/presentationml/2006/main">
   <p:cSld>
     <p:spTree>
       <p:nvGrpSpPr>
@@ -11556,7 +11614,14 @@
         <p:cNvGrpSpPr/>
         <p:nvPr/>
       </p:nvGrpSpPr>
-      <p:grpSpPr/>
+      <p:grpSpPr>
+        <a:xfrm>
+          <a:off x="0" y="0"/>
+          <a:ext cx="0" cy="0"/>
+          <a:chOff x="0" y="0"/>
+          <a:chExt cx="0" cy="0"/>
+        </a:xfrm>
+      </p:grpSpPr>
       <p:sp>
         <p:nvSpPr>
           <p:cNvPr id="2" name="Rectangle 1"/>
@@ -11598,6 +11663,7 @@
           <a:lstStyle/>
           <a:p>
             <a:pPr algn="ctr"/>
+            <a:endParaRPr/>
           </a:p>
         </p:txBody>
       </p:sp>
@@ -11642,6 +11708,7 @@
           <a:lstStyle/>
           <a:p>
             <a:pPr algn="ctr"/>
+            <a:endParaRPr/>
           </a:p>
         </p:txBody>
       </p:sp>
@@ -11662,7 +11729,7 @@
           <a:noFill/>
         </p:spPr>
         <p:txBody>
-          <a:bodyPr wrap="square" anchor="t" lIns="109728" rIns="109728" tIns="54864" bIns="54864">
+          <a:bodyPr wrap="square" lIns="109728" tIns="54864" rIns="109728" bIns="54864" anchor="t">
             <a:spAutoFit/>
           </a:bodyPr>
           <a:lstStyle/>
@@ -11704,7 +11771,7 @@
           <a:noFill/>
         </p:spPr>
         <p:txBody>
-          <a:bodyPr wrap="square" anchor="ctr" lIns="109728" rIns="109728" tIns="54864" bIns="54864">
+          <a:bodyPr wrap="square" lIns="109728" tIns="54864" rIns="109728" bIns="54864" anchor="ctr">
             <a:spAutoFit/>
           </a:bodyPr>
           <a:lstStyle/>
@@ -11770,6 +11837,7 @@
           <a:lstStyle/>
           <a:p>
             <a:pPr algn="ctr"/>
+            <a:endParaRPr/>
           </a:p>
         </p:txBody>
       </p:sp>
@@ -11790,7 +11858,7 @@
           <a:noFill/>
         </p:spPr>
         <p:txBody>
-          <a:bodyPr wrap="square" anchor="ctr" lIns="109728" rIns="109728" tIns="54864" bIns="54864">
+          <a:bodyPr wrap="square" lIns="109728" tIns="54864" rIns="109728" bIns="54864" anchor="ctr">
             <a:spAutoFit/>
           </a:bodyPr>
           <a:lstStyle/>
@@ -11832,7 +11900,7 @@
           <a:noFill/>
         </p:spPr>
         <p:txBody>
-          <a:bodyPr wrap="square" anchor="ctr" lIns="109728" rIns="109728" tIns="54864" bIns="54864">
+          <a:bodyPr wrap="square" lIns="109728" tIns="54864" rIns="109728" bIns="54864" anchor="ctr">
             <a:spAutoFit/>
           </a:bodyPr>
           <a:lstStyle/>
@@ -11882,13 +11950,6 @@
             </a:solidFill>
           </a:ln>
           <a:effectLst/>
-          <a:effectLst>
-            <a:outerShdw blurRad="60000" dist="25000" dir="5400000" rotWithShape="0">
-              <a:srgbClr val="1A1A2E">
-                <a:alpha val="22000"/>
-              </a:srgbClr>
-            </a:outerShdw>
-          </a:effectLst>
         </p:spPr>
         <p:style>
           <a:lnRef idx="1">
@@ -11909,6 +11970,7 @@
           <a:lstStyle/>
           <a:p>
             <a:pPr algn="ctr"/>
+            <a:endParaRPr/>
           </a:p>
         </p:txBody>
       </p:sp>
@@ -11953,6 +12015,7 @@
           <a:lstStyle/>
           <a:p>
             <a:pPr algn="ctr"/>
+            <a:endParaRPr/>
           </a:p>
         </p:txBody>
       </p:sp>
@@ -11973,7 +12036,7 @@
           <a:noFill/>
         </p:spPr>
         <p:txBody>
-          <a:bodyPr wrap="square" anchor="t" lIns="109728" rIns="109728" tIns="54864" bIns="54864">
+          <a:bodyPr wrap="square" lIns="109728" tIns="54864" rIns="109728" bIns="54864" anchor="t">
             <a:spAutoFit/>
           </a:bodyPr>
           <a:lstStyle/>
@@ -12042,13 +12105,6 @@
             </a:solidFill>
           </a:ln>
           <a:effectLst/>
-          <a:effectLst>
-            <a:outerShdw blurRad="60000" dist="25000" dir="5400000" rotWithShape="0">
-              <a:srgbClr val="1A1A2E">
-                <a:alpha val="22000"/>
-              </a:srgbClr>
-            </a:outerShdw>
-          </a:effectLst>
         </p:spPr>
         <p:style>
           <a:lnRef idx="1">
@@ -12069,6 +12125,7 @@
           <a:lstStyle/>
           <a:p>
             <a:pPr algn="ctr"/>
+            <a:endParaRPr/>
           </a:p>
         </p:txBody>
       </p:sp>
@@ -12113,6 +12170,7 @@
           <a:lstStyle/>
           <a:p>
             <a:pPr algn="ctr"/>
+            <a:endParaRPr/>
           </a:p>
         </p:txBody>
       </p:sp>
@@ -12133,7 +12191,7 @@
           <a:noFill/>
         </p:spPr>
         <p:txBody>
-          <a:bodyPr wrap="square" anchor="t" lIns="109728" rIns="109728" tIns="54864" bIns="54864">
+          <a:bodyPr wrap="square" lIns="109728" tIns="54864" rIns="109728" bIns="54864" anchor="t">
             <a:spAutoFit/>
           </a:bodyPr>
           <a:lstStyle/>
@@ -12202,13 +12260,6 @@
             </a:solidFill>
           </a:ln>
           <a:effectLst/>
-          <a:effectLst>
-            <a:outerShdw blurRad="60000" dist="25000" dir="5400000" rotWithShape="0">
-              <a:srgbClr val="1A1A2E">
-                <a:alpha val="22000"/>
-              </a:srgbClr>
-            </a:outerShdw>
-          </a:effectLst>
         </p:spPr>
         <p:style>
           <a:lnRef idx="1">
@@ -12229,6 +12280,7 @@
           <a:lstStyle/>
           <a:p>
             <a:pPr algn="ctr"/>
+            <a:endParaRPr/>
           </a:p>
         </p:txBody>
       </p:sp>
@@ -12273,6 +12325,7 @@
           <a:lstStyle/>
           <a:p>
             <a:pPr algn="ctr"/>
+            <a:endParaRPr/>
           </a:p>
         </p:txBody>
       </p:sp>
@@ -12293,7 +12346,7 @@
           <a:noFill/>
         </p:spPr>
         <p:txBody>
-          <a:bodyPr wrap="square" anchor="t" lIns="109728" rIns="109728" tIns="54864" bIns="54864">
+          <a:bodyPr wrap="square" lIns="109728" tIns="54864" rIns="109728" bIns="54864" anchor="t">
             <a:spAutoFit/>
           </a:bodyPr>
           <a:lstStyle/>
@@ -12362,13 +12415,6 @@
             </a:solidFill>
           </a:ln>
           <a:effectLst/>
-          <a:effectLst>
-            <a:outerShdw blurRad="60000" dist="25000" dir="5400000" rotWithShape="0">
-              <a:srgbClr val="1A1A2E">
-                <a:alpha val="22000"/>
-              </a:srgbClr>
-            </a:outerShdw>
-          </a:effectLst>
         </p:spPr>
         <p:style>
           <a:lnRef idx="1">
@@ -12389,6 +12435,7 @@
           <a:lstStyle/>
           <a:p>
             <a:pPr algn="ctr"/>
+            <a:endParaRPr/>
           </a:p>
         </p:txBody>
       </p:sp>
@@ -12433,6 +12480,7 @@
           <a:lstStyle/>
           <a:p>
             <a:pPr algn="ctr"/>
+            <a:endParaRPr/>
           </a:p>
         </p:txBody>
       </p:sp>
@@ -12453,7 +12501,7 @@
           <a:noFill/>
         </p:spPr>
         <p:txBody>
-          <a:bodyPr wrap="square" anchor="t" lIns="109728" rIns="109728" tIns="54864" bIns="54864">
+          <a:bodyPr wrap="square" lIns="109728" tIns="54864" rIns="109728" bIns="54864" anchor="t">
             <a:spAutoFit/>
           </a:bodyPr>
           <a:lstStyle/>
@@ -12506,7 +12554,7 @@
 </file>
 
 <file path=ppt/slides/slide7.xml><?xml version="1.0" encoding="utf-8"?>
-<p:sld xmlns:a="http://schemas.openxmlformats.org/drawingml/2006/main" xmlns:p="http://schemas.openxmlformats.org/presentationml/2006/main" xmlns:r="http://schemas.openxmlformats.org/officeDocument/2006/relationships">
+<p:sld xmlns:a="http://schemas.openxmlformats.org/drawingml/2006/main" xmlns:r="http://schemas.openxmlformats.org/officeDocument/2006/relationships" xmlns:p="http://schemas.openxmlformats.org/presentationml/2006/main">
   <p:cSld>
     <p:spTree>
       <p:nvGrpSpPr>
@@ -12514,7 +12562,14 @@
         <p:cNvGrpSpPr/>
         <p:nvPr/>
       </p:nvGrpSpPr>
-      <p:grpSpPr/>
+      <p:grpSpPr>
+        <a:xfrm>
+          <a:off x="0" y="0"/>
+          <a:ext cx="0" cy="0"/>
+          <a:chOff x="0" y="0"/>
+          <a:chExt cx="0" cy="0"/>
+        </a:xfrm>
+      </p:grpSpPr>
       <p:sp>
         <p:nvSpPr>
           <p:cNvPr id="2" name="Rectangle 1"/>
@@ -12556,6 +12611,7 @@
           <a:lstStyle/>
           <a:p>
             <a:pPr algn="ctr"/>
+            <a:endParaRPr/>
           </a:p>
         </p:txBody>
       </p:sp>
@@ -12600,6 +12656,7 @@
           <a:lstStyle/>
           <a:p>
             <a:pPr algn="ctr"/>
+            <a:endParaRPr/>
           </a:p>
         </p:txBody>
       </p:sp>
@@ -12620,7 +12677,7 @@
           <a:noFill/>
         </p:spPr>
         <p:txBody>
-          <a:bodyPr wrap="square" anchor="t" lIns="109728" rIns="109728" tIns="54864" bIns="54864">
+          <a:bodyPr wrap="square" lIns="109728" tIns="54864" rIns="109728" bIns="54864" anchor="t">
             <a:spAutoFit/>
           </a:bodyPr>
           <a:lstStyle/>
@@ -12662,7 +12719,7 @@
           <a:noFill/>
         </p:spPr>
         <p:txBody>
-          <a:bodyPr wrap="square" anchor="ctr" lIns="109728" rIns="109728" tIns="54864" bIns="54864">
+          <a:bodyPr wrap="square" lIns="109728" tIns="54864" rIns="109728" bIns="54864" anchor="ctr">
             <a:spAutoFit/>
           </a:bodyPr>
           <a:lstStyle/>
@@ -12728,6 +12785,7 @@
           <a:lstStyle/>
           <a:p>
             <a:pPr algn="ctr"/>
+            <a:endParaRPr/>
           </a:p>
         </p:txBody>
       </p:sp>
@@ -12748,7 +12806,7 @@
           <a:noFill/>
         </p:spPr>
         <p:txBody>
-          <a:bodyPr wrap="square" anchor="ctr" lIns="109728" rIns="109728" tIns="54864" bIns="54864">
+          <a:bodyPr wrap="square" lIns="109728" tIns="54864" rIns="109728" bIns="54864" anchor="ctr">
             <a:spAutoFit/>
           </a:bodyPr>
           <a:lstStyle/>
@@ -12790,7 +12848,7 @@
           <a:noFill/>
         </p:spPr>
         <p:txBody>
-          <a:bodyPr wrap="square" anchor="ctr" lIns="109728" rIns="109728" tIns="54864" bIns="54864">
+          <a:bodyPr wrap="square" lIns="109728" tIns="54864" rIns="109728" bIns="54864" anchor="ctr">
             <a:spAutoFit/>
           </a:bodyPr>
           <a:lstStyle/>
@@ -12858,6 +12916,7 @@
           <a:lstStyle/>
           <a:p>
             <a:pPr algn="ctr"/>
+            <a:endParaRPr/>
           </a:p>
         </p:txBody>
       </p:sp>
@@ -12898,7 +12957,7 @@
           </a:fontRef>
         </p:style>
         <p:txBody>
-          <a:bodyPr rtlCol="0" anchor="ctr" wrap="square" lIns="109728" rIns="109728" tIns="54864" bIns="54864"/>
+          <a:bodyPr wrap="square" lIns="109728" tIns="54864" rIns="109728" bIns="54864" rtlCol="0" anchor="ctr"/>
           <a:lstStyle/>
           <a:p>
             <a:pPr algn="ctr">
@@ -12938,7 +12997,7 @@
           <a:noFill/>
         </p:spPr>
         <p:txBody>
-          <a:bodyPr wrap="square" anchor="ctr" lIns="109728" rIns="109728" tIns="54864" bIns="54864">
+          <a:bodyPr wrap="square" lIns="109728" tIns="54864" rIns="109728" bIns="54864" anchor="ctr">
             <a:spAutoFit/>
           </a:bodyPr>
           <a:lstStyle/>
@@ -13025,6 +13084,7 @@
           <a:lstStyle/>
           <a:p>
             <a:pPr algn="ctr"/>
+            <a:endParaRPr/>
           </a:p>
         </p:txBody>
       </p:sp>
@@ -13065,7 +13125,7 @@
           </a:fontRef>
         </p:style>
         <p:txBody>
-          <a:bodyPr rtlCol="0" anchor="ctr" wrap="square" lIns="109728" rIns="109728" tIns="54864" bIns="54864"/>
+          <a:bodyPr wrap="square" lIns="109728" tIns="54864" rIns="109728" bIns="54864" rtlCol="0" anchor="ctr"/>
           <a:lstStyle/>
           <a:p>
             <a:pPr algn="ctr">
@@ -13105,7 +13165,7 @@
           <a:noFill/>
         </p:spPr>
         <p:txBody>
-          <a:bodyPr wrap="square" anchor="ctr" lIns="109728" rIns="109728" tIns="54864" bIns="54864">
+          <a:bodyPr wrap="square" lIns="109728" tIns="54864" rIns="109728" bIns="54864" anchor="ctr">
             <a:spAutoFit/>
           </a:bodyPr>
           <a:lstStyle/>
@@ -13192,6 +13252,7 @@
           <a:lstStyle/>
           <a:p>
             <a:pPr algn="ctr"/>
+            <a:endParaRPr/>
           </a:p>
         </p:txBody>
       </p:sp>
@@ -13232,7 +13293,7 @@
           </a:fontRef>
         </p:style>
         <p:txBody>
-          <a:bodyPr rtlCol="0" anchor="ctr" wrap="square" lIns="109728" rIns="109728" tIns="54864" bIns="54864"/>
+          <a:bodyPr wrap="square" lIns="109728" tIns="54864" rIns="109728" bIns="54864" rtlCol="0" anchor="ctr"/>
           <a:lstStyle/>
           <a:p>
             <a:pPr algn="ctr">
@@ -13272,7 +13333,7 @@
           <a:noFill/>
         </p:spPr>
         <p:txBody>
-          <a:bodyPr wrap="square" anchor="ctr" lIns="109728" rIns="109728" tIns="54864" bIns="54864">
+          <a:bodyPr wrap="square" lIns="109728" tIns="54864" rIns="109728" bIns="54864" anchor="ctr">
             <a:spAutoFit/>
           </a:bodyPr>
           <a:lstStyle/>
@@ -13359,6 +13420,7 @@
           <a:lstStyle/>
           <a:p>
             <a:pPr algn="ctr"/>
+            <a:endParaRPr/>
           </a:p>
         </p:txBody>
       </p:sp>
@@ -13399,7 +13461,7 @@
           </a:fontRef>
         </p:style>
         <p:txBody>
-          <a:bodyPr rtlCol="0" anchor="ctr" wrap="square" lIns="109728" rIns="109728" tIns="54864" bIns="54864"/>
+          <a:bodyPr wrap="square" lIns="109728" tIns="54864" rIns="109728" bIns="54864" rtlCol="0" anchor="ctr"/>
           <a:lstStyle/>
           <a:p>
             <a:pPr algn="ctr">
@@ -13439,7 +13501,7 @@
           <a:noFill/>
         </p:spPr>
         <p:txBody>
-          <a:bodyPr wrap="square" anchor="ctr" lIns="109728" rIns="109728" tIns="54864" bIns="54864">
+          <a:bodyPr wrap="square" lIns="109728" tIns="54864" rIns="109728" bIns="54864" anchor="ctr">
             <a:spAutoFit/>
           </a:bodyPr>
           <a:lstStyle/>
@@ -13492,7 +13554,7 @@
 </file>
 
 <file path=ppt/slides/slide8.xml><?xml version="1.0" encoding="utf-8"?>
-<p:sld xmlns:a="http://schemas.openxmlformats.org/drawingml/2006/main" xmlns:p="http://schemas.openxmlformats.org/presentationml/2006/main" xmlns:r="http://schemas.openxmlformats.org/officeDocument/2006/relationships">
+<p:sld xmlns:a="http://schemas.openxmlformats.org/drawingml/2006/main" xmlns:r="http://schemas.openxmlformats.org/officeDocument/2006/relationships" xmlns:p="http://schemas.openxmlformats.org/presentationml/2006/main">
   <p:cSld>
     <p:spTree>
       <p:nvGrpSpPr>
@@ -13500,7 +13562,14 @@
         <p:cNvGrpSpPr/>
         <p:nvPr/>
       </p:nvGrpSpPr>
-      <p:grpSpPr/>
+      <p:grpSpPr>
+        <a:xfrm>
+          <a:off x="0" y="0"/>
+          <a:ext cx="0" cy="0"/>
+          <a:chOff x="0" y="0"/>
+          <a:chExt cx="0" cy="0"/>
+        </a:xfrm>
+      </p:grpSpPr>
       <p:sp>
         <p:nvSpPr>
           <p:cNvPr id="2" name="Rectangle 1"/>
@@ -13542,6 +13611,7 @@
           <a:lstStyle/>
           <a:p>
             <a:pPr algn="ctr"/>
+            <a:endParaRPr/>
           </a:p>
         </p:txBody>
       </p:sp>
@@ -13586,6 +13656,7 @@
           <a:lstStyle/>
           <a:p>
             <a:pPr algn="ctr"/>
+            <a:endParaRPr/>
           </a:p>
         </p:txBody>
       </p:sp>
@@ -13606,7 +13677,7 @@
           <a:noFill/>
         </p:spPr>
         <p:txBody>
-          <a:bodyPr wrap="square" anchor="t" lIns="109728" rIns="109728" tIns="54864" bIns="54864">
+          <a:bodyPr wrap="square" lIns="109728" tIns="54864" rIns="109728" bIns="54864" anchor="t">
             <a:spAutoFit/>
           </a:bodyPr>
           <a:lstStyle/>
@@ -13648,7 +13719,7 @@
           <a:noFill/>
         </p:spPr>
         <p:txBody>
-          <a:bodyPr wrap="square" anchor="ctr" lIns="109728" rIns="109728" tIns="54864" bIns="54864">
+          <a:bodyPr wrap="square" lIns="109728" tIns="54864" rIns="109728" bIns="54864" anchor="ctr">
             <a:spAutoFit/>
           </a:bodyPr>
           <a:lstStyle/>
@@ -13714,6 +13785,7 @@
           <a:lstStyle/>
           <a:p>
             <a:pPr algn="ctr"/>
+            <a:endParaRPr/>
           </a:p>
         </p:txBody>
       </p:sp>
@@ -13734,7 +13806,7 @@
           <a:noFill/>
         </p:spPr>
         <p:txBody>
-          <a:bodyPr wrap="square" anchor="ctr" lIns="109728" rIns="109728" tIns="54864" bIns="54864">
+          <a:bodyPr wrap="square" lIns="109728" tIns="54864" rIns="109728" bIns="54864" anchor="ctr">
             <a:spAutoFit/>
           </a:bodyPr>
           <a:lstStyle/>
@@ -13776,7 +13848,7 @@
           <a:noFill/>
         </p:spPr>
         <p:txBody>
-          <a:bodyPr wrap="square" anchor="ctr" lIns="109728" rIns="109728" tIns="54864" bIns="54864">
+          <a:bodyPr wrap="square" lIns="109728" tIns="54864" rIns="109728" bIns="54864" anchor="ctr">
             <a:spAutoFit/>
           </a:bodyPr>
           <a:lstStyle/>
@@ -13826,13 +13898,6 @@
             </a:solidFill>
           </a:ln>
           <a:effectLst/>
-          <a:effectLst>
-            <a:outerShdw blurRad="60000" dist="25000" dir="5400000" rotWithShape="0">
-              <a:srgbClr val="1A1A2E">
-                <a:alpha val="22000"/>
-              </a:srgbClr>
-            </a:outerShdw>
-          </a:effectLst>
         </p:spPr>
         <p:style>
           <a:lnRef idx="1">
@@ -13853,6 +13918,7 @@
           <a:lstStyle/>
           <a:p>
             <a:pPr algn="ctr"/>
+            <a:endParaRPr/>
           </a:p>
         </p:txBody>
       </p:sp>
@@ -13897,6 +13963,7 @@
           <a:lstStyle/>
           <a:p>
             <a:pPr algn="ctr"/>
+            <a:endParaRPr/>
           </a:p>
         </p:txBody>
       </p:sp>
@@ -13917,7 +13984,7 @@
           <a:noFill/>
         </p:spPr>
         <p:txBody>
-          <a:bodyPr wrap="square" anchor="ctr" lIns="109728" rIns="109728" tIns="54864" bIns="54864">
+          <a:bodyPr wrap="square" lIns="109728" tIns="54864" rIns="109728" bIns="54864" anchor="ctr">
             <a:spAutoFit/>
           </a:bodyPr>
           <a:lstStyle/>
@@ -13959,7 +14026,7 @@
           <a:noFill/>
         </p:spPr>
         <p:txBody>
-          <a:bodyPr wrap="square" anchor="ctr" lIns="109728" rIns="109728" tIns="54864" bIns="54864">
+          <a:bodyPr wrap="square" lIns="109728" tIns="54864" rIns="109728" bIns="54864" anchor="ctr">
             <a:spAutoFit/>
           </a:bodyPr>
           <a:lstStyle/>
@@ -14025,6 +14092,7 @@
           <a:lstStyle/>
           <a:p>
             <a:pPr algn="ctr"/>
+            <a:endParaRPr/>
           </a:p>
         </p:txBody>
       </p:sp>
@@ -14053,13 +14121,6 @@
             </a:solidFill>
           </a:ln>
           <a:effectLst/>
-          <a:effectLst>
-            <a:outerShdw blurRad="60000" dist="25000" dir="5400000" rotWithShape="0">
-              <a:srgbClr val="1A1A2E">
-                <a:alpha val="22000"/>
-              </a:srgbClr>
-            </a:outerShdw>
-          </a:effectLst>
         </p:spPr>
         <p:style>
           <a:lnRef idx="1">
@@ -14080,6 +14141,7 @@
           <a:lstStyle/>
           <a:p>
             <a:pPr algn="ctr"/>
+            <a:endParaRPr/>
           </a:p>
         </p:txBody>
       </p:sp>
@@ -14124,6 +14186,7 @@
           <a:lstStyle/>
           <a:p>
             <a:pPr algn="ctr"/>
+            <a:endParaRPr/>
           </a:p>
         </p:txBody>
       </p:sp>
@@ -14144,7 +14207,7 @@
           <a:noFill/>
         </p:spPr>
         <p:txBody>
-          <a:bodyPr wrap="square" anchor="ctr" lIns="109728" rIns="109728" tIns="54864" bIns="54864">
+          <a:bodyPr wrap="square" lIns="109728" tIns="54864" rIns="109728" bIns="54864" anchor="ctr">
             <a:spAutoFit/>
           </a:bodyPr>
           <a:lstStyle/>
@@ -14186,7 +14249,7 @@
           <a:noFill/>
         </p:spPr>
         <p:txBody>
-          <a:bodyPr wrap="square" anchor="ctr" lIns="109728" rIns="109728" tIns="54864" bIns="54864">
+          <a:bodyPr wrap="square" lIns="109728" tIns="54864" rIns="109728" bIns="54864" anchor="ctr">
             <a:spAutoFit/>
           </a:bodyPr>
           <a:lstStyle/>
@@ -14252,6 +14315,7 @@
           <a:lstStyle/>
           <a:p>
             <a:pPr algn="ctr"/>
+            <a:endParaRPr/>
           </a:p>
         </p:txBody>
       </p:sp>
@@ -14280,13 +14344,6 @@
             </a:solidFill>
           </a:ln>
           <a:effectLst/>
-          <a:effectLst>
-            <a:outerShdw blurRad="60000" dist="25000" dir="5400000" rotWithShape="0">
-              <a:srgbClr val="1A1A2E">
-                <a:alpha val="22000"/>
-              </a:srgbClr>
-            </a:outerShdw>
-          </a:effectLst>
         </p:spPr>
         <p:style>
           <a:lnRef idx="1">
@@ -14307,6 +14364,7 @@
           <a:lstStyle/>
           <a:p>
             <a:pPr algn="ctr"/>
+            <a:endParaRPr/>
           </a:p>
         </p:txBody>
       </p:sp>
@@ -14351,6 +14409,7 @@
           <a:lstStyle/>
           <a:p>
             <a:pPr algn="ctr"/>
+            <a:endParaRPr/>
           </a:p>
         </p:txBody>
       </p:sp>
@@ -14371,7 +14430,7 @@
           <a:noFill/>
         </p:spPr>
         <p:txBody>
-          <a:bodyPr wrap="square" anchor="ctr" lIns="109728" rIns="109728" tIns="54864" bIns="54864">
+          <a:bodyPr wrap="square" lIns="109728" tIns="54864" rIns="109728" bIns="54864" anchor="ctr">
             <a:spAutoFit/>
           </a:bodyPr>
           <a:lstStyle/>
@@ -14413,7 +14472,7 @@
           <a:noFill/>
         </p:spPr>
         <p:txBody>
-          <a:bodyPr wrap="square" anchor="ctr" lIns="109728" rIns="109728" tIns="54864" bIns="54864">
+          <a:bodyPr wrap="square" lIns="109728" tIns="54864" rIns="109728" bIns="54864" anchor="ctr">
             <a:spAutoFit/>
           </a:bodyPr>
           <a:lstStyle/>
@@ -14455,7 +14514,7 @@
           <a:noFill/>
         </p:spPr>
         <p:txBody>
-          <a:bodyPr wrap="square" anchor="t" lIns="109728" rIns="109728" tIns="54864" bIns="54864">
+          <a:bodyPr wrap="square" lIns="109728" tIns="54864" rIns="109728" bIns="54864" anchor="t">
             <a:spAutoFit/>
           </a:bodyPr>
           <a:lstStyle/>
@@ -14489,7 +14548,7 @@
 </file>
 
 <file path=ppt/slides/slide9.xml><?xml version="1.0" encoding="utf-8"?>
-<p:sld xmlns:a="http://schemas.openxmlformats.org/drawingml/2006/main" xmlns:p="http://schemas.openxmlformats.org/presentationml/2006/main" xmlns:r="http://schemas.openxmlformats.org/officeDocument/2006/relationships">
+<p:sld xmlns:a="http://schemas.openxmlformats.org/drawingml/2006/main" xmlns:r="http://schemas.openxmlformats.org/officeDocument/2006/relationships" xmlns:p="http://schemas.openxmlformats.org/presentationml/2006/main">
   <p:cSld>
     <p:spTree>
       <p:nvGrpSpPr>
@@ -14497,7 +14556,14 @@
         <p:cNvGrpSpPr/>
         <p:nvPr/>
       </p:nvGrpSpPr>
-      <p:grpSpPr/>
+      <p:grpSpPr>
+        <a:xfrm>
+          <a:off x="0" y="0"/>
+          <a:ext cx="0" cy="0"/>
+          <a:chOff x="0" y="0"/>
+          <a:chExt cx="0" cy="0"/>
+        </a:xfrm>
+      </p:grpSpPr>
       <p:sp>
         <p:nvSpPr>
           <p:cNvPr id="2" name="Rectangle 1"/>
@@ -14539,6 +14605,7 @@
           <a:lstStyle/>
           <a:p>
             <a:pPr algn="ctr"/>
+            <a:endParaRPr/>
           </a:p>
         </p:txBody>
       </p:sp>
@@ -14583,6 +14650,7 @@
           <a:lstStyle/>
           <a:p>
             <a:pPr algn="ctr"/>
+            <a:endParaRPr/>
           </a:p>
         </p:txBody>
       </p:sp>
@@ -14603,7 +14671,7 @@
           <a:noFill/>
         </p:spPr>
         <p:txBody>
-          <a:bodyPr wrap="square" anchor="t" lIns="109728" rIns="109728" tIns="54864" bIns="54864">
+          <a:bodyPr wrap="square" lIns="109728" tIns="54864" rIns="109728" bIns="54864" anchor="t">
             <a:spAutoFit/>
           </a:bodyPr>
           <a:lstStyle/>
@@ -14645,7 +14713,7 @@
           <a:noFill/>
         </p:spPr>
         <p:txBody>
-          <a:bodyPr wrap="square" anchor="ctr" lIns="109728" rIns="109728" tIns="54864" bIns="54864">
+          <a:bodyPr wrap="square" lIns="109728" tIns="54864" rIns="109728" bIns="54864" anchor="ctr">
             <a:spAutoFit/>
           </a:bodyPr>
           <a:lstStyle/>
@@ -14711,6 +14779,7 @@
           <a:lstStyle/>
           <a:p>
             <a:pPr algn="ctr"/>
+            <a:endParaRPr/>
           </a:p>
         </p:txBody>
       </p:sp>
@@ -14731,7 +14800,7 @@
           <a:noFill/>
         </p:spPr>
         <p:txBody>
-          <a:bodyPr wrap="square" anchor="ctr" lIns="109728" rIns="109728" tIns="54864" bIns="54864">
+          <a:bodyPr wrap="square" lIns="109728" tIns="54864" rIns="109728" bIns="54864" anchor="ctr">
             <a:spAutoFit/>
           </a:bodyPr>
           <a:lstStyle/>
@@ -14773,7 +14842,7 @@
           <a:noFill/>
         </p:spPr>
         <p:txBody>
-          <a:bodyPr wrap="square" anchor="ctr" lIns="109728" rIns="109728" tIns="54864" bIns="54864">
+          <a:bodyPr wrap="square" lIns="109728" tIns="54864" rIns="109728" bIns="54864" anchor="ctr">
             <a:spAutoFit/>
           </a:bodyPr>
           <a:lstStyle/>
@@ -14841,6 +14910,7 @@
           <a:lstStyle/>
           <a:p>
             <a:pPr algn="ctr"/>
+            <a:endParaRPr/>
           </a:p>
         </p:txBody>
       </p:sp>
@@ -14881,7 +14951,7 @@
           </a:fontRef>
         </p:style>
         <p:txBody>
-          <a:bodyPr rtlCol="0" anchor="ctr" wrap="square" lIns="109728" rIns="109728" tIns="54864" bIns="54864"/>
+          <a:bodyPr wrap="square" lIns="109728" tIns="54864" rIns="109728" bIns="54864" rtlCol="0" anchor="ctr"/>
           <a:lstStyle/>
           <a:p>
             <a:pPr algn="ctr">
@@ -14921,7 +14991,7 @@
           <a:noFill/>
         </p:spPr>
         <p:txBody>
-          <a:bodyPr wrap="square" anchor="ctr" lIns="109728" rIns="109728" tIns="54864" bIns="54864">
+          <a:bodyPr wrap="square" lIns="109728" tIns="54864" rIns="109728" bIns="54864" anchor="ctr">
             <a:spAutoFit/>
           </a:bodyPr>
           <a:lstStyle/>
@@ -15008,6 +15078,7 @@
           <a:lstStyle/>
           <a:p>
             <a:pPr algn="ctr"/>
+            <a:endParaRPr/>
           </a:p>
         </p:txBody>
       </p:sp>
@@ -15048,7 +15119,7 @@
           </a:fontRef>
         </p:style>
         <p:txBody>
-          <a:bodyPr rtlCol="0" anchor="ctr" wrap="square" lIns="109728" rIns="109728" tIns="54864" bIns="54864"/>
+          <a:bodyPr wrap="square" lIns="109728" tIns="54864" rIns="109728" bIns="54864" rtlCol="0" anchor="ctr"/>
           <a:lstStyle/>
           <a:p>
             <a:pPr algn="ctr">
@@ -15088,7 +15159,7 @@
           <a:noFill/>
         </p:spPr>
         <p:txBody>
-          <a:bodyPr wrap="square" anchor="ctr" lIns="109728" rIns="109728" tIns="54864" bIns="54864">
+          <a:bodyPr wrap="square" lIns="109728" tIns="54864" rIns="109728" bIns="54864" anchor="ctr">
             <a:spAutoFit/>
           </a:bodyPr>
           <a:lstStyle/>
@@ -15175,6 +15246,7 @@
           <a:lstStyle/>
           <a:p>
             <a:pPr algn="ctr"/>
+            <a:endParaRPr/>
           </a:p>
         </p:txBody>
       </p:sp>
@@ -15215,7 +15287,7 @@
           </a:fontRef>
         </p:style>
         <p:txBody>
-          <a:bodyPr rtlCol="0" anchor="ctr" wrap="square" lIns="109728" rIns="109728" tIns="54864" bIns="54864"/>
+          <a:bodyPr wrap="square" lIns="109728" tIns="54864" rIns="109728" bIns="54864" rtlCol="0" anchor="ctr"/>
           <a:lstStyle/>
           <a:p>
             <a:pPr algn="ctr">
@@ -15255,7 +15327,7 @@
           <a:noFill/>
         </p:spPr>
         <p:txBody>
-          <a:bodyPr wrap="square" anchor="ctr" lIns="109728" rIns="109728" tIns="54864" bIns="54864">
+          <a:bodyPr wrap="square" lIns="109728" tIns="54864" rIns="109728" bIns="54864" anchor="ctr">
             <a:spAutoFit/>
           </a:bodyPr>
           <a:lstStyle/>
@@ -15342,6 +15414,7 @@
           <a:lstStyle/>
           <a:p>
             <a:pPr algn="ctr"/>
+            <a:endParaRPr/>
           </a:p>
         </p:txBody>
       </p:sp>
@@ -15382,7 +15455,7 @@
           </a:fontRef>
         </p:style>
         <p:txBody>
-          <a:bodyPr rtlCol="0" anchor="ctr" wrap="square" lIns="109728" rIns="109728" tIns="54864" bIns="54864"/>
+          <a:bodyPr wrap="square" lIns="109728" tIns="54864" rIns="109728" bIns="54864" rtlCol="0" anchor="ctr"/>
           <a:lstStyle/>
           <a:p>
             <a:pPr algn="ctr">
@@ -15422,7 +15495,7 @@
           <a:noFill/>
         </p:spPr>
         <p:txBody>
-          <a:bodyPr wrap="square" anchor="ctr" lIns="109728" rIns="109728" tIns="54864" bIns="54864">
+          <a:bodyPr wrap="square" lIns="109728" tIns="54864" rIns="109728" bIns="54864" anchor="ctr">
             <a:spAutoFit/>
           </a:bodyPr>
           <a:lstStyle/>
